--- a/Presentations/Module_1_Build_the_IoT_Estimator_Presentation.pptx
+++ b/Presentations/Module_1_Build_the_IoT_Estimator_Presentation.pptx
@@ -2,27 +2,30 @@
 <file path=ppt/presentation.xml><?xml version="1.0" encoding="utf-8"?>
 <p:presentation xmlns:p="http://schemas.openxmlformats.org/presentationml/2006/main">
   <p:sldMasterIdLst>
-    <p:sldMasterId xmlns:r="http://schemas.openxmlformats.org/officeDocument/2006/relationships" id="2147483648" r:id="R2afeee441c3f4db5"/>
+    <p:sldMasterId xmlns:r="http://schemas.openxmlformats.org/officeDocument/2006/relationships" id="2147483648" r:id="R53f2d096ff6d4511"/>
   </p:sldMasterIdLst>
   <p:notesMasterIdLst>
-    <p:notesMasterId xmlns:r="http://schemas.openxmlformats.org/officeDocument/2006/relationships" r:id="Rac3b6f7e6ac14edd"/>
+    <p:notesMasterId xmlns:r="http://schemas.openxmlformats.org/officeDocument/2006/relationships" r:id="Ra65d11f4ee4e46ae"/>
   </p:notesMasterIdLst>
   <p:sldIdLst>
-    <p:sldId xmlns:r="http://schemas.openxmlformats.org/officeDocument/2006/relationships" id="256" r:id="R48f5c37a14e84738"/>
-    <p:sldId xmlns:r="http://schemas.openxmlformats.org/officeDocument/2006/relationships" id="257" r:id="R4caadf12d51e4a85"/>
-    <p:sldId xmlns:r="http://schemas.openxmlformats.org/officeDocument/2006/relationships" id="258" r:id="R6f4f6e06991c4851"/>
-    <p:sldId xmlns:r="http://schemas.openxmlformats.org/officeDocument/2006/relationships" id="259" r:id="Rfb34e79d407343c6"/>
-    <p:sldId xmlns:r="http://schemas.openxmlformats.org/officeDocument/2006/relationships" id="260" r:id="Raabdf29edb474ec8"/>
-    <p:sldId xmlns:r="http://schemas.openxmlformats.org/officeDocument/2006/relationships" id="261" r:id="Rfd7a176794ba46df"/>
-    <p:sldId xmlns:r="http://schemas.openxmlformats.org/officeDocument/2006/relationships" id="262" r:id="Rc840a497aee54cd1"/>
-    <p:sldId xmlns:r="http://schemas.openxmlformats.org/officeDocument/2006/relationships" id="263" r:id="Rc106d227d57d4ef6"/>
-    <p:sldId xmlns:r="http://schemas.openxmlformats.org/officeDocument/2006/relationships" id="264" r:id="Rfc4f80cddd9e4d2f"/>
-    <p:sldId xmlns:r="http://schemas.openxmlformats.org/officeDocument/2006/relationships" id="265" r:id="R609a71ff950c4227"/>
-    <p:sldId xmlns:r="http://schemas.openxmlformats.org/officeDocument/2006/relationships" id="266" r:id="R6727918c0a7b47de"/>
-    <p:sldId xmlns:r="http://schemas.openxmlformats.org/officeDocument/2006/relationships" id="267" r:id="Rf9fe24d3731c4947"/>
-    <p:sldId xmlns:r="http://schemas.openxmlformats.org/officeDocument/2006/relationships" id="268" r:id="R055709711c4f4d49"/>
-    <p:sldId xmlns:r="http://schemas.openxmlformats.org/officeDocument/2006/relationships" id="269" r:id="R9a3a21dc5bb94eac"/>
-    <p:sldId xmlns:r="http://schemas.openxmlformats.org/officeDocument/2006/relationships" id="270" r:id="Rf797888ae3e14190"/>
+    <p:sldId xmlns:r="http://schemas.openxmlformats.org/officeDocument/2006/relationships" id="256" r:id="R9f2f3b30929d4e12"/>
+    <p:sldId xmlns:r="http://schemas.openxmlformats.org/officeDocument/2006/relationships" id="257" r:id="R34fe383633b1400b"/>
+    <p:sldId xmlns:r="http://schemas.openxmlformats.org/officeDocument/2006/relationships" id="258" r:id="Rcd9cdefb71694ff3"/>
+    <p:sldId xmlns:r="http://schemas.openxmlformats.org/officeDocument/2006/relationships" id="259" r:id="R0e6b980e4ad04644"/>
+    <p:sldId xmlns:r="http://schemas.openxmlformats.org/officeDocument/2006/relationships" id="260" r:id="Rc173140c009d43a0"/>
+    <p:sldId xmlns:r="http://schemas.openxmlformats.org/officeDocument/2006/relationships" id="261" r:id="R2ff7055a92ed4670"/>
+    <p:sldId xmlns:r="http://schemas.openxmlformats.org/officeDocument/2006/relationships" id="262" r:id="R823e9b25e2c34ff1"/>
+    <p:sldId xmlns:r="http://schemas.openxmlformats.org/officeDocument/2006/relationships" id="263" r:id="Rf4c8a19283cf4546"/>
+    <p:sldId xmlns:r="http://schemas.openxmlformats.org/officeDocument/2006/relationships" id="264" r:id="Rc5c0eb2bdb654099"/>
+    <p:sldId xmlns:r="http://schemas.openxmlformats.org/officeDocument/2006/relationships" id="265" r:id="R0ec193071afd42ec"/>
+    <p:sldId xmlns:r="http://schemas.openxmlformats.org/officeDocument/2006/relationships" id="266" r:id="Ra411b300dfad4759"/>
+    <p:sldId xmlns:r="http://schemas.openxmlformats.org/officeDocument/2006/relationships" id="267" r:id="Ra0563ce0f5454b9d"/>
+    <p:sldId xmlns:r="http://schemas.openxmlformats.org/officeDocument/2006/relationships" id="268" r:id="R827fd62d7be847a1"/>
+    <p:sldId xmlns:r="http://schemas.openxmlformats.org/officeDocument/2006/relationships" id="269" r:id="Rd74b936dd79048e7"/>
+    <p:sldId xmlns:r="http://schemas.openxmlformats.org/officeDocument/2006/relationships" id="270" r:id="R8871b04519964fda"/>
+    <p:sldId xmlns:r="http://schemas.openxmlformats.org/officeDocument/2006/relationships" id="271" r:id="Rff90c5204d5e4ee3"/>
+    <p:sldId xmlns:r="http://schemas.openxmlformats.org/officeDocument/2006/relationships" id="272" r:id="R1675b5e290e4483b"/>
+    <p:sldId xmlns:r="http://schemas.openxmlformats.org/officeDocument/2006/relationships" id="273" r:id="R6cfdbfe1e4844236"/>
   </p:sldIdLst>
   <p:sldSz cx="12192000" cy="6858000"/>
   <p:notesSz cx="6858000" cy="9144000"/>
@@ -583,7 +586,7 @@
           <a:lstStyle xmlns:a="http://schemas.openxmlformats.org/drawingml/2006/main"/>
           <a:p xmlns:a="http://schemas.openxmlformats.org/drawingml/2006/main">
             <a:r>
-              <a:t>Introduce Module 1. Open the matching Word tutorial after the exercise overview.</a:t>
+              <a:t>Open the matching Word tutorial after the exercise overview. Source: Module 1 Word tutorial.</a:t>
             </a:r>
           </a:p>
         </p:txBody>
@@ -653,7 +656,7 @@
           <a:lstStyle xmlns:a="http://schemas.openxmlformats.org/drawingml/2006/main"/>
           <a:p xmlns:a="http://schemas.openxmlformats.org/drawingml/2006/main">
             <a:r>
-              <a:t>After tutorial Step 16: run the app or inspect the code. Ask students to explain the observed result. Source: Module 1 Word tutorial.</a:t>
+              <a:t>After tutorial Step 12: run the app or inspect the code. Ask students to explain the observed result. Source: Module 1 Word tutorial.</a:t>
             </a:r>
           </a:p>
         </p:txBody>
@@ -723,7 +726,7 @@
           <a:lstStyle xmlns:a="http://schemas.openxmlformats.org/drawingml/2006/main"/>
           <a:p xmlns:a="http://schemas.openxmlformats.org/drawingml/2006/main">
             <a:r>
-              <a:t>Before tutorial Step 20: explain these concepts. Ask students to predict what the change will do. Then open Step 20 in the Word tutorial. Source: Module 1 Word tutorial.</a:t>
+              <a:t>Before tutorial Step 16: explain these concepts. Ask students to predict what the change will do. Then open Step 16 in the Word tutorial. Source: Module 1 Word tutorial. Related MAUI documentation: https://learn.microsoft.com/dotnet/maui/xaml/fundamentals/get-started</a:t>
             </a:r>
           </a:p>
         </p:txBody>
@@ -793,7 +796,7 @@
           <a:lstStyle xmlns:a="http://schemas.openxmlformats.org/drawingml/2006/main"/>
           <a:p xmlns:a="http://schemas.openxmlformats.org/drawingml/2006/main">
             <a:r>
-              <a:t>After tutorial Step 20: run the app or inspect the code. Ask students to explain the observed result. Source: Module 1 Word tutorial.</a:t>
+              <a:t>After tutorial Step 16: run the app or inspect the code. Ask students to explain the observed result. Source: Module 1 Word tutorial.</a:t>
             </a:r>
           </a:p>
         </p:txBody>
@@ -863,7 +866,7 @@
           <a:lstStyle xmlns:a="http://schemas.openxmlformats.org/drawingml/2006/main"/>
           <a:p xmlns:a="http://schemas.openxmlformats.org/drawingml/2006/main">
             <a:r>
-              <a:t>Before tutorial Step 21: explain these concepts. Ask students to predict what the change will do. Then open Step 21 in the Word tutorial. Source: Module 1 Word tutorial.</a:t>
+              <a:t>Before tutorial Step 20: explain these concepts. Ask students to predict what the change will do. Then open Step 20 in the Word tutorial. Source: Module 1 Word tutorial. Related MAUI documentation: https://learn.microsoft.com/dotnet/maui/xaml/fundamentals/get-started</a:t>
             </a:r>
           </a:p>
         </p:txBody>
@@ -933,7 +936,7 @@
           <a:lstStyle xmlns:a="http://schemas.openxmlformats.org/drawingml/2006/main"/>
           <a:p xmlns:a="http://schemas.openxmlformats.org/drawingml/2006/main">
             <a:r>
-              <a:t>After tutorial Step 21: run the app or inspect the code. Ask students to explain the observed result. Source: Module 1 Word tutorial.</a:t>
+              <a:t>After tutorial Step 20: run the app or inspect the code. Ask students to explain the observed result. Source: Module 1 Word tutorial.</a:t>
             </a:r>
           </a:p>
         </p:txBody>
@@ -1003,7 +1006,217 @@
           <a:lstStyle xmlns:a="http://schemas.openxmlformats.org/drawingml/2006/main"/>
           <a:p xmlns:a="http://schemas.openxmlformats.org/drawingml/2006/main">
             <a:r>
+              <a:t>Before tutorial Step 21: explain these concepts. Ask students to predict what the change will do. Then open Step 21 in the Word tutorial. Source: Module 1 Word tutorial. Related MAUI documentation: https://learn.microsoft.com/dotnet/maui/xaml/fundamentals/get-started</a:t>
+            </a:r>
+          </a:p>
+        </p:txBody>
+      </p:sp>
+      <p:sp>
+        <p:nvSpPr>
+          <p:cNvPr id="4" name="Slide Number Placeholder 3"/>
+          <p:cNvSpPr>
+            <a:spLocks xmlns:a="http://schemas.openxmlformats.org/drawingml/2006/main" noGrp="1"/>
+          </p:cNvSpPr>
+          <p:nvPr>
+            <p:ph type="sldNum" idx="5"/>
+          </p:nvPr>
+        </p:nvSpPr>
+        <p:spPr/>
+        <p:txBody>
+          <a:bodyPr xmlns:a="http://schemas.openxmlformats.org/drawingml/2006/main"/>
+          <a:lstStyle xmlns:a="http://schemas.openxmlformats.org/drawingml/2006/main"/>
+          <a:p xmlns:a="http://schemas.openxmlformats.org/drawingml/2006/main"/>
+        </p:txBody>
+      </p:sp>
+    </p:spTree>
+  </p:cSld>
+  <p:clrMapOvr>
+    <a:masterClrMapping xmlns:a="http://schemas.openxmlformats.org/drawingml/2006/main"/>
+  </p:clrMapOvr>
+</p:notes>
+</file>
+
+<file path=ppt/notesSlides/notesSlide16.xml><?xml version="1.0" encoding="utf-8"?>
+<p:notes xmlns:p="http://schemas.openxmlformats.org/presentationml/2006/main">
+  <p:cSld>
+    <p:spTree>
+      <p:nvGrpSpPr>
+        <p:cNvPr id="1" name=""/>
+        <p:cNvGrpSpPr/>
+        <p:nvPr/>
+      </p:nvGrpSpPr>
+      <p:grpSpPr>
+        <a:xfrm xmlns:a="http://schemas.openxmlformats.org/drawingml/2006/main"/>
+      </p:grpSpPr>
+      <p:sp>
+        <p:nvSpPr>
+          <p:cNvPr id="2" name="Slide Image Placeholder 1"/>
+          <p:cNvSpPr>
+            <a:spLocks xmlns:a="http://schemas.openxmlformats.org/drawingml/2006/main" noGrp="1"/>
+          </p:cNvSpPr>
+          <p:nvPr>
+            <p:ph type="sldImg" idx="0"/>
+          </p:nvPr>
+        </p:nvSpPr>
+        <p:spPr/>
+      </p:sp>
+      <p:sp>
+        <p:nvSpPr>
+          <p:cNvPr id="3" name="Notes Placeholder 2"/>
+          <p:cNvSpPr>
+            <a:spLocks xmlns:a="http://schemas.openxmlformats.org/drawingml/2006/main" noGrp="1"/>
+          </p:cNvSpPr>
+          <p:nvPr>
+            <p:ph type="body" idx="1"/>
+          </p:nvPr>
+        </p:nvSpPr>
+        <p:spPr/>
+        <p:txBody>
+          <a:bodyPr xmlns:a="http://schemas.openxmlformats.org/drawingml/2006/main"/>
+          <a:lstStyle xmlns:a="http://schemas.openxmlformats.org/drawingml/2006/main"/>
+          <a:p xmlns:a="http://schemas.openxmlformats.org/drawingml/2006/main">
+            <a:r>
+              <a:t>After tutorial Step 21: run the app or inspect the code. Ask students to explain the observed result. Source: Module 1 Word tutorial.</a:t>
+            </a:r>
+          </a:p>
+        </p:txBody>
+      </p:sp>
+      <p:sp>
+        <p:nvSpPr>
+          <p:cNvPr id="4" name="Slide Number Placeholder 3"/>
+          <p:cNvSpPr>
+            <a:spLocks xmlns:a="http://schemas.openxmlformats.org/drawingml/2006/main" noGrp="1"/>
+          </p:cNvSpPr>
+          <p:nvPr>
+            <p:ph type="sldNum" idx="5"/>
+          </p:nvPr>
+        </p:nvSpPr>
+        <p:spPr/>
+        <p:txBody>
+          <a:bodyPr xmlns:a="http://schemas.openxmlformats.org/drawingml/2006/main"/>
+          <a:lstStyle xmlns:a="http://schemas.openxmlformats.org/drawingml/2006/main"/>
+          <a:p xmlns:a="http://schemas.openxmlformats.org/drawingml/2006/main"/>
+        </p:txBody>
+      </p:sp>
+    </p:spTree>
+  </p:cSld>
+  <p:clrMapOvr>
+    <a:masterClrMapping xmlns:a="http://schemas.openxmlformats.org/drawingml/2006/main"/>
+  </p:clrMapOvr>
+</p:notes>
+</file>
+
+<file path=ppt/notesSlides/notesSlide17.xml><?xml version="1.0" encoding="utf-8"?>
+<p:notes xmlns:p="http://schemas.openxmlformats.org/presentationml/2006/main">
+  <p:cSld>
+    <p:spTree>
+      <p:nvGrpSpPr>
+        <p:cNvPr id="1" name=""/>
+        <p:cNvGrpSpPr/>
+        <p:nvPr/>
+      </p:nvGrpSpPr>
+      <p:grpSpPr>
+        <a:xfrm xmlns:a="http://schemas.openxmlformats.org/drawingml/2006/main"/>
+      </p:grpSpPr>
+      <p:sp>
+        <p:nvSpPr>
+          <p:cNvPr id="2" name="Slide Image Placeholder 1"/>
+          <p:cNvSpPr>
+            <a:spLocks xmlns:a="http://schemas.openxmlformats.org/drawingml/2006/main" noGrp="1"/>
+          </p:cNvSpPr>
+          <p:nvPr>
+            <p:ph type="sldImg" idx="0"/>
+          </p:nvPr>
+        </p:nvSpPr>
+        <p:spPr/>
+      </p:sp>
+      <p:sp>
+        <p:nvSpPr>
+          <p:cNvPr id="3" name="Notes Placeholder 2"/>
+          <p:cNvSpPr>
+            <a:spLocks xmlns:a="http://schemas.openxmlformats.org/drawingml/2006/main" noGrp="1"/>
+          </p:cNvSpPr>
+          <p:nvPr>
+            <p:ph type="body" idx="1"/>
+          </p:nvPr>
+        </p:nvSpPr>
+        <p:spPr/>
+        <p:txBody>
+          <a:bodyPr xmlns:a="http://schemas.openxmlformats.org/drawingml/2006/main"/>
+          <a:lstStyle xmlns:a="http://schemas.openxmlformats.org/drawingml/2006/main"/>
+          <a:p xmlns:a="http://schemas.openxmlformats.org/drawingml/2006/main">
+            <a:r>
               <a:t>Use the final tutorial checklist. Ask students to explain the module concept without reading code. Source: Module 1 Word tutorial.</a:t>
+            </a:r>
+          </a:p>
+        </p:txBody>
+      </p:sp>
+      <p:sp>
+        <p:nvSpPr>
+          <p:cNvPr id="4" name="Slide Number Placeholder 3"/>
+          <p:cNvSpPr>
+            <a:spLocks xmlns:a="http://schemas.openxmlformats.org/drawingml/2006/main" noGrp="1"/>
+          </p:cNvSpPr>
+          <p:nvPr>
+            <p:ph type="sldNum" idx="5"/>
+          </p:nvPr>
+        </p:nvSpPr>
+        <p:spPr/>
+        <p:txBody>
+          <a:bodyPr xmlns:a="http://schemas.openxmlformats.org/drawingml/2006/main"/>
+          <a:lstStyle xmlns:a="http://schemas.openxmlformats.org/drawingml/2006/main"/>
+          <a:p xmlns:a="http://schemas.openxmlformats.org/drawingml/2006/main"/>
+        </p:txBody>
+      </p:sp>
+    </p:spTree>
+  </p:cSld>
+  <p:clrMapOvr>
+    <a:masterClrMapping xmlns:a="http://schemas.openxmlformats.org/drawingml/2006/main"/>
+  </p:clrMapOvr>
+</p:notes>
+</file>
+
+<file path=ppt/notesSlides/notesSlide18.xml><?xml version="1.0" encoding="utf-8"?>
+<p:notes xmlns:p="http://schemas.openxmlformats.org/presentationml/2006/main">
+  <p:cSld>
+    <p:spTree>
+      <p:nvGrpSpPr>
+        <p:cNvPr id="1" name=""/>
+        <p:cNvGrpSpPr/>
+        <p:nvPr/>
+      </p:nvGrpSpPr>
+      <p:grpSpPr>
+        <a:xfrm xmlns:a="http://schemas.openxmlformats.org/drawingml/2006/main"/>
+      </p:grpSpPr>
+      <p:sp>
+        <p:nvSpPr>
+          <p:cNvPr id="2" name="Slide Image Placeholder 1"/>
+          <p:cNvSpPr>
+            <a:spLocks xmlns:a="http://schemas.openxmlformats.org/drawingml/2006/main" noGrp="1"/>
+          </p:cNvSpPr>
+          <p:nvPr>
+            <p:ph type="sldImg" idx="0"/>
+          </p:nvPr>
+        </p:nvSpPr>
+        <p:spPr/>
+      </p:sp>
+      <p:sp>
+        <p:nvSpPr>
+          <p:cNvPr id="3" name="Notes Placeholder 2"/>
+          <p:cNvSpPr>
+            <a:spLocks xmlns:a="http://schemas.openxmlformats.org/drawingml/2006/main" noGrp="1"/>
+          </p:cNvSpPr>
+          <p:nvPr>
+            <p:ph type="body" idx="1"/>
+          </p:nvPr>
+        </p:nvSpPr>
+        <p:spPr/>
+        <p:txBody>
+          <a:bodyPr xmlns:a="http://schemas.openxmlformats.org/drawingml/2006/main"/>
+          <a:lstStyle xmlns:a="http://schemas.openxmlformats.org/drawingml/2006/main"/>
+          <a:p xmlns:a="http://schemas.openxmlformats.org/drawingml/2006/main">
+            <a:r>
+              <a:t>Student reading: XAML basics and Shell. https://learn.microsoft.com/dotnet/maui/xaml/fundamentals/get-started</a:t>
             </a:r>
           </a:p>
         </p:txBody>
@@ -1073,7 +1286,7 @@
           <a:lstStyle xmlns:a="http://schemas.openxmlformats.org/drawingml/2006/main"/>
           <a:p xmlns:a="http://schemas.openxmlformats.org/drawingml/2006/main">
             <a:r>
-              <a:t>Explain the work for Module 1. Show the expected app result before students start. Source: Module 1 Word tutorial.</a:t>
+              <a:t>Give students the outcome before they start. Source: Module 1 Word tutorial.</a:t>
             </a:r>
           </a:p>
         </p:txBody>
@@ -1143,7 +1356,7 @@
           <a:lstStyle xmlns:a="http://schemas.openxmlformats.org/drawingml/2006/main"/>
           <a:p xmlns:a="http://schemas.openxmlformats.org/drawingml/2006/main">
             <a:r>
-              <a:t>Before tutorial Step 1: explain these concepts. Ask students to predict what the change will do. Then open Step 1 in the Word tutorial. Source: Module 1 Word tutorial.</a:t>
+              <a:t>Explain the framework idea before the first exercise step. MAUI documentation: https://learn.microsoft.com/dotnet/maui/xaml/fundamentals/get-started</a:t>
             </a:r>
           </a:p>
         </p:txBody>
@@ -1213,7 +1426,7 @@
           <a:lstStyle xmlns:a="http://schemas.openxmlformats.org/drawingml/2006/main"/>
           <a:p xmlns:a="http://schemas.openxmlformats.org/drawingml/2006/main">
             <a:r>
-              <a:t>After tutorial Step 1: run the app or inspect the code. Ask students to explain the observed result. Source: Module 1 Word tutorial.</a:t>
+              <a:t>Ask students to identify the C# object, the XAML control, and the connection between them. Source: Module 1 Word tutorial. MAUI documentation: https://learn.microsoft.com/dotnet/maui/xaml/fundamentals/get-started</a:t>
             </a:r>
           </a:p>
         </p:txBody>
@@ -1283,7 +1496,7 @@
           <a:lstStyle xmlns:a="http://schemas.openxmlformats.org/drawingml/2006/main"/>
           <a:p xmlns:a="http://schemas.openxmlformats.org/drawingml/2006/main">
             <a:r>
-              <a:t>Before tutorial Step 5: explain these concepts. Ask students to predict what the change will do. Then open Step 5 in the Word tutorial. Source: Module 1 Word tutorial.</a:t>
+              <a:t>Before tutorial Step 1: explain these concepts. Ask students to predict what the change will do. Then open Step 1 in the Word tutorial. Source: Module 1 Word tutorial. Related MAUI documentation: https://learn.microsoft.com/dotnet/maui/xaml/fundamentals/get-started</a:t>
             </a:r>
           </a:p>
         </p:txBody>
@@ -1353,7 +1566,7 @@
           <a:lstStyle xmlns:a="http://schemas.openxmlformats.org/drawingml/2006/main"/>
           <a:p xmlns:a="http://schemas.openxmlformats.org/drawingml/2006/main">
             <a:r>
-              <a:t>After tutorial Step 5: run the app or inspect the code. Ask students to explain the observed result. Source: Module 1 Word tutorial.</a:t>
+              <a:t>After tutorial Step 1: run the app or inspect the code. Ask students to explain the observed result. Source: Module 1 Word tutorial.</a:t>
             </a:r>
           </a:p>
         </p:txBody>
@@ -1423,7 +1636,7 @@
           <a:lstStyle xmlns:a="http://schemas.openxmlformats.org/drawingml/2006/main"/>
           <a:p xmlns:a="http://schemas.openxmlformats.org/drawingml/2006/main">
             <a:r>
-              <a:t>Before tutorial Step 12: explain these concepts. Ask students to predict what the change will do. Then open Step 12 in the Word tutorial. Source: Module 1 Word tutorial.</a:t>
+              <a:t>Before tutorial Step 5: explain these concepts. Ask students to predict what the change will do. Then open Step 5 in the Word tutorial. Source: Module 1 Word tutorial. Related MAUI documentation: https://learn.microsoft.com/dotnet/maui/xaml/fundamentals/get-started</a:t>
             </a:r>
           </a:p>
         </p:txBody>
@@ -1493,7 +1706,7 @@
           <a:lstStyle xmlns:a="http://schemas.openxmlformats.org/drawingml/2006/main"/>
           <a:p xmlns:a="http://schemas.openxmlformats.org/drawingml/2006/main">
             <a:r>
-              <a:t>After tutorial Step 12: run the app or inspect the code. Ask students to explain the observed result. Source: Module 1 Word tutorial.</a:t>
+              <a:t>After tutorial Step 5: run the app or inspect the code. Ask students to explain the observed result. Source: Module 1 Word tutorial.</a:t>
             </a:r>
           </a:p>
         </p:txBody>
@@ -1563,7 +1776,7 @@
           <a:lstStyle xmlns:a="http://schemas.openxmlformats.org/drawingml/2006/main"/>
           <a:p xmlns:a="http://schemas.openxmlformats.org/drawingml/2006/main">
             <a:r>
-              <a:t>Before tutorial Step 16: explain these concepts. Ask students to predict what the change will do. Then open Step 16 in the Word tutorial. Source: Module 1 Word tutorial.</a:t>
+              <a:t>Before tutorial Step 12: explain these concepts. Ask students to predict what the change will do. Then open Step 12 in the Word tutorial. Source: Module 1 Word tutorial. Related MAUI documentation: https://learn.microsoft.com/dotnet/maui/xaml/fundamentals/get-started</a:t>
             </a:r>
           </a:p>
         </p:txBody>
@@ -1673,7 +1886,7 @@
           <p:cNvPr id="14" name="Picture 13">
             <a:extLst xmlns:a="http://schemas.openxmlformats.org/drawingml/2006/main">
               <a:ext uri="{FF2B5EF4-FFF2-40B4-BE49-F238E27FC236}">
-                <a16:creationId xmlns:a16="http://schemas.microsoft.com/office/drawing/2014/main" id="{2F978DF4-6466-4C88-9BD5-69A5D5CD112D}"/>
+                <a16:creationId xmlns:a16="http://schemas.microsoft.com/office/drawing/2014/main" id="{F8171F36-3ED3-470F-84D3-DA270308C590}"/>
               </a:ext>
             </a:extLst>
           </p:cNvPr>
@@ -1683,7 +1896,7 @@
           <p:nvPr/>
         </p:nvPicPr>
         <p:blipFill>
-          <a:blip xmlns:r="http://schemas.openxmlformats.org/officeDocument/2006/relationships" xmlns:a="http://schemas.openxmlformats.org/drawingml/2006/main" r:embed="Rc5f9fea2e45348c1">
+          <a:blip xmlns:r="http://schemas.openxmlformats.org/officeDocument/2006/relationships" xmlns:a="http://schemas.openxmlformats.org/drawingml/2006/main" r:embed="Rf1df230df1144375">
             <a:alphaModFix amt="40000"/>
           </a:blip>
           <a:stretch xmlns:a="http://schemas.openxmlformats.org/drawingml/2006/main">
@@ -1846,7 +2059,7 @@
           <p:cNvPr id="2" name="Title 1">
             <a:extLst xmlns:a="http://schemas.openxmlformats.org/drawingml/2006/main">
               <a:ext uri="{FF2B5EF4-FFF2-40B4-BE49-F238E27FC236}">
-                <a16:creationId xmlns:a16="http://schemas.microsoft.com/office/drawing/2014/main" id="{14F7F910-3611-43FC-967A-777825D6930F}"/>
+                <a16:creationId xmlns:a16="http://schemas.microsoft.com/office/drawing/2014/main" id="{A6CCE810-F9AB-4C09-A91D-EA3EC80F8486}"/>
               </a:ext>
             </a:extLst>
           </p:cNvPr>
@@ -1893,7 +2106,7 @@
           <p:cNvPr id="3" name="Subtitle 2">
             <a:extLst xmlns:a="http://schemas.openxmlformats.org/drawingml/2006/main">
               <a:ext uri="{FF2B5EF4-FFF2-40B4-BE49-F238E27FC236}">
-                <a16:creationId xmlns:a16="http://schemas.microsoft.com/office/drawing/2014/main" id="{0F99A6EC-ECB0-4FD1-8FC6-2E559030BD58}"/>
+                <a16:creationId xmlns:a16="http://schemas.microsoft.com/office/drawing/2014/main" id="{DE728A48-BBDA-4282-9347-14FED54CD5C3}"/>
               </a:ext>
             </a:extLst>
           </p:cNvPr>
@@ -2021,7 +2234,7 @@
           <p:cNvPr id="4" name="Date Placeholder 3">
             <a:extLst xmlns:a="http://schemas.openxmlformats.org/drawingml/2006/main">
               <a:ext uri="{FF2B5EF4-FFF2-40B4-BE49-F238E27FC236}">
-                <a16:creationId xmlns:a16="http://schemas.microsoft.com/office/drawing/2014/main" id="{8F1D244E-21DC-4D12-8B4A-8B88E1200035}"/>
+                <a16:creationId xmlns:a16="http://schemas.microsoft.com/office/drawing/2014/main" id="{17804BDE-77D9-401D-AE72-5F5A3BFDA260}"/>
               </a:ext>
             </a:extLst>
           </p:cNvPr>
@@ -2049,7 +2262,7 @@
           <p:cNvPr id="5" name="Footer Placeholder 4">
             <a:extLst xmlns:a="http://schemas.openxmlformats.org/drawingml/2006/main">
               <a:ext uri="{FF2B5EF4-FFF2-40B4-BE49-F238E27FC236}">
-                <a16:creationId xmlns:a16="http://schemas.microsoft.com/office/drawing/2014/main" id="{60478845-C6BA-465F-824E-8263093329C7}"/>
+                <a16:creationId xmlns:a16="http://schemas.microsoft.com/office/drawing/2014/main" id="{7646B640-A012-45CF-8120-F4BD123A0C31}"/>
               </a:ext>
             </a:extLst>
           </p:cNvPr>
@@ -2074,7 +2287,7 @@
           <p:cNvPr id="6" name="Slide Number Placeholder 5">
             <a:extLst xmlns:a="http://schemas.openxmlformats.org/drawingml/2006/main">
               <a:ext uri="{FF2B5EF4-FFF2-40B4-BE49-F238E27FC236}">
-                <a16:creationId xmlns:a16="http://schemas.microsoft.com/office/drawing/2014/main" id="{70C2244E-31B1-4E47-90D5-911F5312F2B1}"/>
+                <a16:creationId xmlns:a16="http://schemas.microsoft.com/office/drawing/2014/main" id="{62D1328B-A50E-4894-8CA6-F5FDAFC18069}"/>
               </a:ext>
             </a:extLst>
           </p:cNvPr>
@@ -2173,7 +2386,7 @@
           <p:cNvPr id="2" name="Title 1">
             <a:extLst xmlns:a="http://schemas.openxmlformats.org/drawingml/2006/main">
               <a:ext uri="{FF2B5EF4-FFF2-40B4-BE49-F238E27FC236}">
-                <a16:creationId xmlns:a16="http://schemas.microsoft.com/office/drawing/2014/main" id="{C363C3CC-FD12-425B-9D6A-A2DDE1E4A0B7}"/>
+                <a16:creationId xmlns:a16="http://schemas.microsoft.com/office/drawing/2014/main" id="{13182EA9-975D-458A-913F-C3D68EDA4AB7}"/>
               </a:ext>
             </a:extLst>
           </p:cNvPr>
@@ -2200,7 +2413,7 @@
           <p:cNvPr id="3" name="Vertical Text Placeholder 2">
             <a:extLst xmlns:a="http://schemas.openxmlformats.org/drawingml/2006/main">
               <a:ext uri="{FF2B5EF4-FFF2-40B4-BE49-F238E27FC236}">
-                <a16:creationId xmlns:a16="http://schemas.microsoft.com/office/drawing/2014/main" id="{0E812A15-FD52-4D7C-932A-782CC5DABBC1}"/>
+                <a16:creationId xmlns:a16="http://schemas.microsoft.com/office/drawing/2014/main" id="{B13E4388-7883-4CE2-A5EF-6CD1D0F0CB0F}"/>
               </a:ext>
             </a:extLst>
           </p:cNvPr>
@@ -2262,7 +2475,7 @@
           <p:cNvPr id="4" name="Date Placeholder 3">
             <a:extLst xmlns:a="http://schemas.openxmlformats.org/drawingml/2006/main">
               <a:ext uri="{FF2B5EF4-FFF2-40B4-BE49-F238E27FC236}">
-                <a16:creationId xmlns:a16="http://schemas.microsoft.com/office/drawing/2014/main" id="{AEB58CE2-7EBD-4CCB-8F45-3F3FEA74B4BF}"/>
+                <a16:creationId xmlns:a16="http://schemas.microsoft.com/office/drawing/2014/main" id="{89671127-9D6F-41D1-9EBB-5F66AB36D070}"/>
               </a:ext>
             </a:extLst>
           </p:cNvPr>
@@ -2290,7 +2503,7 @@
           <p:cNvPr id="5" name="Footer Placeholder 4">
             <a:extLst xmlns:a="http://schemas.openxmlformats.org/drawingml/2006/main">
               <a:ext uri="{FF2B5EF4-FFF2-40B4-BE49-F238E27FC236}">
-                <a16:creationId xmlns:a16="http://schemas.microsoft.com/office/drawing/2014/main" id="{EB73FEC5-4D84-4E07-9888-A01F4D518CDE}"/>
+                <a16:creationId xmlns:a16="http://schemas.microsoft.com/office/drawing/2014/main" id="{63C14623-E1B5-4BC3-A069-36B7E13D4205}"/>
               </a:ext>
             </a:extLst>
           </p:cNvPr>
@@ -2315,7 +2528,7 @@
           <p:cNvPr id="6" name="Slide Number Placeholder 5">
             <a:extLst xmlns:a="http://schemas.openxmlformats.org/drawingml/2006/main">
               <a:ext uri="{FF2B5EF4-FFF2-40B4-BE49-F238E27FC236}">
-                <a16:creationId xmlns:a16="http://schemas.microsoft.com/office/drawing/2014/main" id="{EA7667FD-E11E-4A76-9C41-D0F61DDC1054}"/>
+                <a16:creationId xmlns:a16="http://schemas.microsoft.com/office/drawing/2014/main" id="{ECCB12F2-3F3D-41E9-9127-3B9051F45C3A}"/>
               </a:ext>
             </a:extLst>
           </p:cNvPr>
@@ -2360,7 +2573,7 @@
           <p:cNvPr id="2" name="Vertical Title 1">
             <a:extLst xmlns:a="http://schemas.openxmlformats.org/drawingml/2006/main">
               <a:ext uri="{FF2B5EF4-FFF2-40B4-BE49-F238E27FC236}">
-                <a16:creationId xmlns:a16="http://schemas.microsoft.com/office/drawing/2014/main" id="{78006ADB-46BB-4338-92E9-FBE8EDE4A45E}"/>
+                <a16:creationId xmlns:a16="http://schemas.microsoft.com/office/drawing/2014/main" id="{D3729C6C-4F42-4E8F-89A3-30F534E2CDD1}"/>
               </a:ext>
             </a:extLst>
           </p:cNvPr>
@@ -2392,7 +2605,7 @@
           <p:cNvPr id="3" name="Vertical Text Placeholder 2">
             <a:extLst xmlns:a="http://schemas.openxmlformats.org/drawingml/2006/main">
               <a:ext uri="{FF2B5EF4-FFF2-40B4-BE49-F238E27FC236}">
-                <a16:creationId xmlns:a16="http://schemas.microsoft.com/office/drawing/2014/main" id="{D8E686B2-CE6D-4FFF-BFD1-513FA3AEDEA0}"/>
+                <a16:creationId xmlns:a16="http://schemas.microsoft.com/office/drawing/2014/main" id="{5568AD41-404D-4C23-A1CC-8775F0E4495D}"/>
               </a:ext>
             </a:extLst>
           </p:cNvPr>
@@ -2459,7 +2672,7 @@
           <p:cNvPr id="4" name="Date Placeholder 3">
             <a:extLst xmlns:a="http://schemas.openxmlformats.org/drawingml/2006/main">
               <a:ext uri="{FF2B5EF4-FFF2-40B4-BE49-F238E27FC236}">
-                <a16:creationId xmlns:a16="http://schemas.microsoft.com/office/drawing/2014/main" id="{97BADFCE-CADA-4512-96DD-9ABEE4E010FF}"/>
+                <a16:creationId xmlns:a16="http://schemas.microsoft.com/office/drawing/2014/main" id="{8B45F0FA-FEAB-427B-92FC-A68623745E52}"/>
               </a:ext>
             </a:extLst>
           </p:cNvPr>
@@ -2487,7 +2700,7 @@
           <p:cNvPr id="5" name="Footer Placeholder 4">
             <a:extLst xmlns:a="http://schemas.openxmlformats.org/drawingml/2006/main">
               <a:ext uri="{FF2B5EF4-FFF2-40B4-BE49-F238E27FC236}">
-                <a16:creationId xmlns:a16="http://schemas.microsoft.com/office/drawing/2014/main" id="{741E8A8E-365A-4ACE-A9AB-0194396F82F8}"/>
+                <a16:creationId xmlns:a16="http://schemas.microsoft.com/office/drawing/2014/main" id="{B9A0A7D1-0556-40D1-8E38-E103BC65772A}"/>
               </a:ext>
             </a:extLst>
           </p:cNvPr>
@@ -2512,7 +2725,7 @@
           <p:cNvPr id="6" name="Slide Number Placeholder 5">
             <a:extLst xmlns:a="http://schemas.openxmlformats.org/drawingml/2006/main">
               <a:ext uri="{FF2B5EF4-FFF2-40B4-BE49-F238E27FC236}">
-                <a16:creationId xmlns:a16="http://schemas.microsoft.com/office/drawing/2014/main" id="{914A23EF-88AF-4CCE-A47E-B7963DE8ED88}"/>
+                <a16:creationId xmlns:a16="http://schemas.microsoft.com/office/drawing/2014/main" id="{5B019DF6-C0EA-4967-A8A0-4353783D3CE7}"/>
               </a:ext>
             </a:extLst>
           </p:cNvPr>
@@ -2557,7 +2770,7 @@
           <p:cNvPr id="3" name="Content Placeholder 2">
             <a:extLst xmlns:a="http://schemas.openxmlformats.org/drawingml/2006/main">
               <a:ext uri="{FF2B5EF4-FFF2-40B4-BE49-F238E27FC236}">
-                <a16:creationId xmlns:a16="http://schemas.microsoft.com/office/drawing/2014/main" id="{2E03F15E-18FE-4E65-B556-CBCC35D79B6F}"/>
+                <a16:creationId xmlns:a16="http://schemas.microsoft.com/office/drawing/2014/main" id="{B471258F-4095-4468-B85C-B9BC9B4BEBB0}"/>
               </a:ext>
             </a:extLst>
           </p:cNvPr>
@@ -2620,7 +2833,7 @@
           <p:cNvPr id="4" name="Date Placeholder 3">
             <a:extLst xmlns:a="http://schemas.openxmlformats.org/drawingml/2006/main">
               <a:ext uri="{FF2B5EF4-FFF2-40B4-BE49-F238E27FC236}">
-                <a16:creationId xmlns:a16="http://schemas.microsoft.com/office/drawing/2014/main" id="{1A3491CB-FF8F-46D2-A696-F43E57D28F39}"/>
+                <a16:creationId xmlns:a16="http://schemas.microsoft.com/office/drawing/2014/main" id="{44AD184D-F6CC-45ED-9BFE-425D544DAD5D}"/>
               </a:ext>
             </a:extLst>
           </p:cNvPr>
@@ -2648,7 +2861,7 @@
           <p:cNvPr id="5" name="Footer Placeholder 4">
             <a:extLst xmlns:a="http://schemas.openxmlformats.org/drawingml/2006/main">
               <a:ext uri="{FF2B5EF4-FFF2-40B4-BE49-F238E27FC236}">
-                <a16:creationId xmlns:a16="http://schemas.microsoft.com/office/drawing/2014/main" id="{3269A24F-4863-4258-8C34-9AF8B9EBF133}"/>
+                <a16:creationId xmlns:a16="http://schemas.microsoft.com/office/drawing/2014/main" id="{F6D2083A-6F27-448F-8B69-EA278C533E01}"/>
               </a:ext>
             </a:extLst>
           </p:cNvPr>
@@ -2673,7 +2886,7 @@
           <p:cNvPr id="6" name="Slide Number Placeholder 5">
             <a:extLst xmlns:a="http://schemas.openxmlformats.org/drawingml/2006/main">
               <a:ext uri="{FF2B5EF4-FFF2-40B4-BE49-F238E27FC236}">
-                <a16:creationId xmlns:a16="http://schemas.microsoft.com/office/drawing/2014/main" id="{9ACACFF8-6384-4EB8-89F2-605F8C7D0517}"/>
+                <a16:creationId xmlns:a16="http://schemas.microsoft.com/office/drawing/2014/main" id="{2CDE78BB-ED1E-473C-8E12-D2D7E3781B4E}"/>
               </a:ext>
             </a:extLst>
           </p:cNvPr>
@@ -2761,7 +2974,7 @@
           <p:cNvPr id="2" name="Title 1">
             <a:extLst xmlns:a="http://schemas.openxmlformats.org/drawingml/2006/main">
               <a:ext uri="{FF2B5EF4-FFF2-40B4-BE49-F238E27FC236}">
-                <a16:creationId xmlns:a16="http://schemas.microsoft.com/office/drawing/2014/main" id="{BFB7B654-A639-432F-9371-F5084B495A8A}"/>
+                <a16:creationId xmlns:a16="http://schemas.microsoft.com/office/drawing/2014/main" id="{D7582217-8FE9-4F57-B3F4-6B29B48DA183}"/>
               </a:ext>
             </a:extLst>
           </p:cNvPr>
@@ -2799,7 +3012,7 @@
           <p:cNvPr id="3" name="Text Placeholder 2">
             <a:extLst xmlns:a="http://schemas.openxmlformats.org/drawingml/2006/main">
               <a:ext uri="{FF2B5EF4-FFF2-40B4-BE49-F238E27FC236}">
-                <a16:creationId xmlns:a16="http://schemas.microsoft.com/office/drawing/2014/main" id="{70405228-824E-424E-A4C0-ED1659A2D9F7}"/>
+                <a16:creationId xmlns:a16="http://schemas.microsoft.com/office/drawing/2014/main" id="{B9A08107-6C0A-4BE4-895F-436C6FB069A4}"/>
               </a:ext>
             </a:extLst>
           </p:cNvPr>
@@ -2925,7 +3138,7 @@
           <p:cNvPr id="4" name="Date Placeholder 3">
             <a:extLst xmlns:a="http://schemas.openxmlformats.org/drawingml/2006/main">
               <a:ext uri="{FF2B5EF4-FFF2-40B4-BE49-F238E27FC236}">
-                <a16:creationId xmlns:a16="http://schemas.microsoft.com/office/drawing/2014/main" id="{D242DABB-08BA-4F85-9839-3A04C33D54D5}"/>
+                <a16:creationId xmlns:a16="http://schemas.microsoft.com/office/drawing/2014/main" id="{1AAE4122-ECAE-491C-882E-ACF84C2C79C9}"/>
               </a:ext>
             </a:extLst>
           </p:cNvPr>
@@ -2953,7 +3166,7 @@
           <p:cNvPr id="5" name="Footer Placeholder 4">
             <a:extLst xmlns:a="http://schemas.openxmlformats.org/drawingml/2006/main">
               <a:ext uri="{FF2B5EF4-FFF2-40B4-BE49-F238E27FC236}">
-                <a16:creationId xmlns:a16="http://schemas.microsoft.com/office/drawing/2014/main" id="{0E6B1B9A-233F-4ABB-AA37-6B65C534522B}"/>
+                <a16:creationId xmlns:a16="http://schemas.microsoft.com/office/drawing/2014/main" id="{70A139F2-2FF0-4159-AC9A-8DC48D7D03A4}"/>
               </a:ext>
             </a:extLst>
           </p:cNvPr>
@@ -2978,7 +3191,7 @@
           <p:cNvPr id="6" name="Slide Number Placeholder 5">
             <a:extLst xmlns:a="http://schemas.openxmlformats.org/drawingml/2006/main">
               <a:ext uri="{FF2B5EF4-FFF2-40B4-BE49-F238E27FC236}">
-                <a16:creationId xmlns:a16="http://schemas.microsoft.com/office/drawing/2014/main" id="{C8CD3FC6-1DA2-4422-AB44-0071C7292494}"/>
+                <a16:creationId xmlns:a16="http://schemas.microsoft.com/office/drawing/2014/main" id="{5D90D0A4-06A7-43C9-B23A-0F8C9875EF81}"/>
               </a:ext>
             </a:extLst>
           </p:cNvPr>
@@ -3023,7 +3236,7 @@
           <p:cNvPr id="2" name="Title 1">
             <a:extLst xmlns:a="http://schemas.openxmlformats.org/drawingml/2006/main">
               <a:ext uri="{FF2B5EF4-FFF2-40B4-BE49-F238E27FC236}">
-                <a16:creationId xmlns:a16="http://schemas.microsoft.com/office/drawing/2014/main" id="{B667DB66-682C-43E0-8936-C021A16315F1}"/>
+                <a16:creationId xmlns:a16="http://schemas.microsoft.com/office/drawing/2014/main" id="{3BD44DC1-FD41-4D65-9287-C131A79A6CD8}"/>
               </a:ext>
             </a:extLst>
           </p:cNvPr>
@@ -3050,7 +3263,7 @@
           <p:cNvPr id="3" name="Content Placeholder 2">
             <a:extLst xmlns:a="http://schemas.openxmlformats.org/drawingml/2006/main">
               <a:ext uri="{FF2B5EF4-FFF2-40B4-BE49-F238E27FC236}">
-                <a16:creationId xmlns:a16="http://schemas.microsoft.com/office/drawing/2014/main" id="{C648DADE-374E-4FEC-811B-65F4EA5A9A97}"/>
+                <a16:creationId xmlns:a16="http://schemas.microsoft.com/office/drawing/2014/main" id="{8052F005-5429-4BD7-B14F-A13B3D5EF280}"/>
               </a:ext>
             </a:extLst>
           </p:cNvPr>
@@ -3155,7 +3368,7 @@
           <p:cNvPr id="4" name="Content Placeholder 3">
             <a:extLst xmlns:a="http://schemas.openxmlformats.org/drawingml/2006/main">
               <a:ext uri="{FF2B5EF4-FFF2-40B4-BE49-F238E27FC236}">
-                <a16:creationId xmlns:a16="http://schemas.microsoft.com/office/drawing/2014/main" id="{96872FA1-232C-459F-BB77-4DBC214DEE9E}"/>
+                <a16:creationId xmlns:a16="http://schemas.microsoft.com/office/drawing/2014/main" id="{90B43189-7BF7-4648-9D23-4DDE0AF15C3E}"/>
               </a:ext>
             </a:extLst>
           </p:cNvPr>
@@ -3260,7 +3473,7 @@
           <p:cNvPr id="5" name="Date Placeholder 4">
             <a:extLst xmlns:a="http://schemas.openxmlformats.org/drawingml/2006/main">
               <a:ext uri="{FF2B5EF4-FFF2-40B4-BE49-F238E27FC236}">
-                <a16:creationId xmlns:a16="http://schemas.microsoft.com/office/drawing/2014/main" id="{DA8A764B-3985-49D7-BF0E-0CD61617694A}"/>
+                <a16:creationId xmlns:a16="http://schemas.microsoft.com/office/drawing/2014/main" id="{B2422092-61D7-449B-9D11-C8410E56CD47}"/>
               </a:ext>
             </a:extLst>
           </p:cNvPr>
@@ -3288,7 +3501,7 @@
           <p:cNvPr id="6" name="Footer Placeholder 5">
             <a:extLst xmlns:a="http://schemas.openxmlformats.org/drawingml/2006/main">
               <a:ext uri="{FF2B5EF4-FFF2-40B4-BE49-F238E27FC236}">
-                <a16:creationId xmlns:a16="http://schemas.microsoft.com/office/drawing/2014/main" id="{8F550F44-8A20-40A2-9816-CBEF81F6A04D}"/>
+                <a16:creationId xmlns:a16="http://schemas.microsoft.com/office/drawing/2014/main" id="{B85208F1-1DAF-442E-8C78-D8F17862AD3D}"/>
               </a:ext>
             </a:extLst>
           </p:cNvPr>
@@ -3313,7 +3526,7 @@
           <p:cNvPr id="7" name="Slide Number Placeholder 6">
             <a:extLst xmlns:a="http://schemas.openxmlformats.org/drawingml/2006/main">
               <a:ext uri="{FF2B5EF4-FFF2-40B4-BE49-F238E27FC236}">
-                <a16:creationId xmlns:a16="http://schemas.microsoft.com/office/drawing/2014/main" id="{52652836-9ACB-451B-9D00-0D85CB00F744}"/>
+                <a16:creationId xmlns:a16="http://schemas.microsoft.com/office/drawing/2014/main" id="{C3E0A92C-F9C9-4A8C-AED8-2040C4C237F2}"/>
               </a:ext>
             </a:extLst>
           </p:cNvPr>
@@ -3358,7 +3571,7 @@
           <p:cNvPr id="2" name="Title 1">
             <a:extLst xmlns:a="http://schemas.openxmlformats.org/drawingml/2006/main">
               <a:ext uri="{FF2B5EF4-FFF2-40B4-BE49-F238E27FC236}">
-                <a16:creationId xmlns:a16="http://schemas.microsoft.com/office/drawing/2014/main" id="{344011DE-1548-4233-9A6E-003BC23573D1}"/>
+                <a16:creationId xmlns:a16="http://schemas.microsoft.com/office/drawing/2014/main" id="{44737AEF-8B9F-4451-934E-6A84BFB16B32}"/>
               </a:ext>
             </a:extLst>
           </p:cNvPr>
@@ -3390,7 +3603,7 @@
           <p:cNvPr id="3" name="Text Placeholder 2">
             <a:extLst xmlns:a="http://schemas.openxmlformats.org/drawingml/2006/main">
               <a:ext uri="{FF2B5EF4-FFF2-40B4-BE49-F238E27FC236}">
-                <a16:creationId xmlns:a16="http://schemas.microsoft.com/office/drawing/2014/main" id="{53A4CA7E-7547-433F-99D6-2952EA5C8A2D}"/>
+                <a16:creationId xmlns:a16="http://schemas.microsoft.com/office/drawing/2014/main" id="{B95A4479-3AA9-4117-AA67-FEF14DC9923F}"/>
               </a:ext>
             </a:extLst>
           </p:cNvPr>
@@ -3462,7 +3675,7 @@
           <p:cNvPr id="4" name="Content Placeholder 3">
             <a:extLst xmlns:a="http://schemas.openxmlformats.org/drawingml/2006/main">
               <a:ext uri="{FF2B5EF4-FFF2-40B4-BE49-F238E27FC236}">
-                <a16:creationId xmlns:a16="http://schemas.microsoft.com/office/drawing/2014/main" id="{5CF62014-8AC6-4939-9CA8-F591DB67D101}"/>
+                <a16:creationId xmlns:a16="http://schemas.microsoft.com/office/drawing/2014/main" id="{C1F8C82A-2FD5-4220-8263-5347E5CBB79B}"/>
               </a:ext>
             </a:extLst>
           </p:cNvPr>
@@ -3566,7 +3779,7 @@
           <p:cNvPr id="5" name="Text Placeholder 4">
             <a:extLst xmlns:a="http://schemas.openxmlformats.org/drawingml/2006/main">
               <a:ext uri="{FF2B5EF4-FFF2-40B4-BE49-F238E27FC236}">
-                <a16:creationId xmlns:a16="http://schemas.microsoft.com/office/drawing/2014/main" id="{7726F756-2298-450D-AF3C-E7FF292AF44C}"/>
+                <a16:creationId xmlns:a16="http://schemas.microsoft.com/office/drawing/2014/main" id="{089BD9E3-BBDA-420D-8131-61E264ABD8C3}"/>
               </a:ext>
             </a:extLst>
           </p:cNvPr>
@@ -3638,7 +3851,7 @@
           <p:cNvPr id="6" name="Content Placeholder 5">
             <a:extLst xmlns:a="http://schemas.openxmlformats.org/drawingml/2006/main">
               <a:ext uri="{FF2B5EF4-FFF2-40B4-BE49-F238E27FC236}">
-                <a16:creationId xmlns:a16="http://schemas.microsoft.com/office/drawing/2014/main" id="{9636681C-4DB6-45A3-9CC1-1E34FBEB5799}"/>
+                <a16:creationId xmlns:a16="http://schemas.microsoft.com/office/drawing/2014/main" id="{8ED47CF3-FAB2-40A7-AB12-90F97A3518ED}"/>
               </a:ext>
             </a:extLst>
           </p:cNvPr>
@@ -3742,7 +3955,7 @@
           <p:cNvPr id="7" name="Date Placeholder 6">
             <a:extLst xmlns:a="http://schemas.openxmlformats.org/drawingml/2006/main">
               <a:ext uri="{FF2B5EF4-FFF2-40B4-BE49-F238E27FC236}">
-                <a16:creationId xmlns:a16="http://schemas.microsoft.com/office/drawing/2014/main" id="{86053148-A284-44EB-83A3-71A76E2ABD75}"/>
+                <a16:creationId xmlns:a16="http://schemas.microsoft.com/office/drawing/2014/main" id="{6BD3309D-AAFA-4075-ADCA-61FB3D509872}"/>
               </a:ext>
             </a:extLst>
           </p:cNvPr>
@@ -3770,7 +3983,7 @@
           <p:cNvPr id="8" name="Footer Placeholder 7">
             <a:extLst xmlns:a="http://schemas.openxmlformats.org/drawingml/2006/main">
               <a:ext uri="{FF2B5EF4-FFF2-40B4-BE49-F238E27FC236}">
-                <a16:creationId xmlns:a16="http://schemas.microsoft.com/office/drawing/2014/main" id="{656FA87F-58A5-43AB-A133-A8127B818B20}"/>
+                <a16:creationId xmlns:a16="http://schemas.microsoft.com/office/drawing/2014/main" id="{5F279AE4-0C1D-4F73-A0BA-8063CD3A10AE}"/>
               </a:ext>
             </a:extLst>
           </p:cNvPr>
@@ -3795,7 +4008,7 @@
           <p:cNvPr id="9" name="Slide Number Placeholder 8">
             <a:extLst xmlns:a="http://schemas.openxmlformats.org/drawingml/2006/main">
               <a:ext uri="{FF2B5EF4-FFF2-40B4-BE49-F238E27FC236}">
-                <a16:creationId xmlns:a16="http://schemas.microsoft.com/office/drawing/2014/main" id="{360BCD9B-4B7C-4911-B2EC-630BF5C17181}"/>
+                <a16:creationId xmlns:a16="http://schemas.microsoft.com/office/drawing/2014/main" id="{FFEE8BD9-E83C-4163-9177-5CCF3A1F5202}"/>
               </a:ext>
             </a:extLst>
           </p:cNvPr>
@@ -3840,7 +4053,7 @@
           <p:cNvPr id="2" name="Title 1">
             <a:extLst xmlns:a="http://schemas.openxmlformats.org/drawingml/2006/main">
               <a:ext uri="{FF2B5EF4-FFF2-40B4-BE49-F238E27FC236}">
-                <a16:creationId xmlns:a16="http://schemas.microsoft.com/office/drawing/2014/main" id="{D82E25A8-320F-4534-A59A-D1AFB8395E6D}"/>
+                <a16:creationId xmlns:a16="http://schemas.microsoft.com/office/drawing/2014/main" id="{5A2EFFB8-9538-4C7D-81A5-2E34FF304CFA}"/>
               </a:ext>
             </a:extLst>
           </p:cNvPr>
@@ -3867,7 +4080,7 @@
           <p:cNvPr id="3" name="Date Placeholder 2">
             <a:extLst xmlns:a="http://schemas.openxmlformats.org/drawingml/2006/main">
               <a:ext uri="{FF2B5EF4-FFF2-40B4-BE49-F238E27FC236}">
-                <a16:creationId xmlns:a16="http://schemas.microsoft.com/office/drawing/2014/main" id="{DABDBE3E-F1C2-42EA-ADF6-A7F6FEC6C7BB}"/>
+                <a16:creationId xmlns:a16="http://schemas.microsoft.com/office/drawing/2014/main" id="{E7976C85-A479-49A3-AD2A-5B4531876288}"/>
               </a:ext>
             </a:extLst>
           </p:cNvPr>
@@ -3895,7 +4108,7 @@
           <p:cNvPr id="4" name="Footer Placeholder 3">
             <a:extLst xmlns:a="http://schemas.openxmlformats.org/drawingml/2006/main">
               <a:ext uri="{FF2B5EF4-FFF2-40B4-BE49-F238E27FC236}">
-                <a16:creationId xmlns:a16="http://schemas.microsoft.com/office/drawing/2014/main" id="{6245BC78-DB7D-4132-8286-8844F3793DF9}"/>
+                <a16:creationId xmlns:a16="http://schemas.microsoft.com/office/drawing/2014/main" id="{77ECE45B-BDCD-42BC-8275-9F02021F3A75}"/>
               </a:ext>
             </a:extLst>
           </p:cNvPr>
@@ -3920,7 +4133,7 @@
           <p:cNvPr id="5" name="Slide Number Placeholder 4">
             <a:extLst xmlns:a="http://schemas.openxmlformats.org/drawingml/2006/main">
               <a:ext uri="{FF2B5EF4-FFF2-40B4-BE49-F238E27FC236}">
-                <a16:creationId xmlns:a16="http://schemas.microsoft.com/office/drawing/2014/main" id="{7B14D979-22EF-4388-90CA-5011D6642A06}"/>
+                <a16:creationId xmlns:a16="http://schemas.microsoft.com/office/drawing/2014/main" id="{E0A4812D-F7EA-4463-B5B7-5179A030948B}"/>
               </a:ext>
             </a:extLst>
           </p:cNvPr>
@@ -3965,7 +4178,7 @@
           <p:cNvPr id="2" name="Date Placeholder 1">
             <a:extLst xmlns:a="http://schemas.openxmlformats.org/drawingml/2006/main">
               <a:ext uri="{FF2B5EF4-FFF2-40B4-BE49-F238E27FC236}">
-                <a16:creationId xmlns:a16="http://schemas.microsoft.com/office/drawing/2014/main" id="{BBDA4CFD-3314-407E-AFD8-904A9A854A73}"/>
+                <a16:creationId xmlns:a16="http://schemas.microsoft.com/office/drawing/2014/main" id="{B6F4983C-44BB-4B24-91A0-D42C3577B7CD}"/>
               </a:ext>
             </a:extLst>
           </p:cNvPr>
@@ -3993,7 +4206,7 @@
           <p:cNvPr id="3" name="Footer Placeholder 2">
             <a:extLst xmlns:a="http://schemas.openxmlformats.org/drawingml/2006/main">
               <a:ext uri="{FF2B5EF4-FFF2-40B4-BE49-F238E27FC236}">
-                <a16:creationId xmlns:a16="http://schemas.microsoft.com/office/drawing/2014/main" id="{AC2938CC-234A-4A78-9E2F-1A901A5426D2}"/>
+                <a16:creationId xmlns:a16="http://schemas.microsoft.com/office/drawing/2014/main" id="{A81C38A5-1EA3-4359-BEED-315EB27E4462}"/>
               </a:ext>
             </a:extLst>
           </p:cNvPr>
@@ -4018,7 +4231,7 @@
           <p:cNvPr id="4" name="Slide Number Placeholder 3">
             <a:extLst xmlns:a="http://schemas.openxmlformats.org/drawingml/2006/main">
               <a:ext uri="{FF2B5EF4-FFF2-40B4-BE49-F238E27FC236}">
-                <a16:creationId xmlns:a16="http://schemas.microsoft.com/office/drawing/2014/main" id="{A0282061-0AD2-48AA-9950-A305C405847C}"/>
+                <a16:creationId xmlns:a16="http://schemas.microsoft.com/office/drawing/2014/main" id="{CA47C830-9731-4A2C-A000-77E8EE8233F6}"/>
               </a:ext>
             </a:extLst>
           </p:cNvPr>
@@ -4063,7 +4276,7 @@
           <p:cNvPr id="2" name="Title 1">
             <a:extLst xmlns:a="http://schemas.openxmlformats.org/drawingml/2006/main">
               <a:ext uri="{FF2B5EF4-FFF2-40B4-BE49-F238E27FC236}">
-                <a16:creationId xmlns:a16="http://schemas.microsoft.com/office/drawing/2014/main" id="{4BE63A66-A89D-41CB-B507-59D2215773ED}"/>
+                <a16:creationId xmlns:a16="http://schemas.microsoft.com/office/drawing/2014/main" id="{B2A2242F-AE23-40AA-8980-4BFE8E6035D4}"/>
               </a:ext>
             </a:extLst>
           </p:cNvPr>
@@ -4100,7 +4313,7 @@
           <p:cNvPr id="3" name="Content Placeholder 2">
             <a:extLst xmlns:a="http://schemas.openxmlformats.org/drawingml/2006/main">
               <a:ext uri="{FF2B5EF4-FFF2-40B4-BE49-F238E27FC236}">
-                <a16:creationId xmlns:a16="http://schemas.microsoft.com/office/drawing/2014/main" id="{433ECC92-85A8-4DDA-81FB-585B8C48EE90}"/>
+                <a16:creationId xmlns:a16="http://schemas.microsoft.com/office/drawing/2014/main" id="{C62042CD-1CE9-4883-86C3-1EF6B2CEAA24}"/>
               </a:ext>
             </a:extLst>
           </p:cNvPr>
@@ -4204,7 +4417,7 @@
           <p:cNvPr id="4" name="Text Placeholder 3">
             <a:extLst xmlns:a="http://schemas.openxmlformats.org/drawingml/2006/main">
               <a:ext uri="{FF2B5EF4-FFF2-40B4-BE49-F238E27FC236}">
-                <a16:creationId xmlns:a16="http://schemas.microsoft.com/office/drawing/2014/main" id="{96090FDC-6CF0-4433-A209-51934872F2DB}"/>
+                <a16:creationId xmlns:a16="http://schemas.microsoft.com/office/drawing/2014/main" id="{FC78F349-710E-414D-9001-14D7C43FAD6C}"/>
               </a:ext>
             </a:extLst>
           </p:cNvPr>
@@ -4276,7 +4489,7 @@
           <p:cNvPr id="5" name="Date Placeholder 4">
             <a:extLst xmlns:a="http://schemas.openxmlformats.org/drawingml/2006/main">
               <a:ext uri="{FF2B5EF4-FFF2-40B4-BE49-F238E27FC236}">
-                <a16:creationId xmlns:a16="http://schemas.microsoft.com/office/drawing/2014/main" id="{7379E0E3-CD93-4229-802A-C65AB1FD2EB9}"/>
+                <a16:creationId xmlns:a16="http://schemas.microsoft.com/office/drawing/2014/main" id="{95C5B10C-6B35-42F7-B5CC-6AF9D71F1C13}"/>
               </a:ext>
             </a:extLst>
           </p:cNvPr>
@@ -4304,7 +4517,7 @@
           <p:cNvPr id="6" name="Footer Placeholder 5">
             <a:extLst xmlns:a="http://schemas.openxmlformats.org/drawingml/2006/main">
               <a:ext uri="{FF2B5EF4-FFF2-40B4-BE49-F238E27FC236}">
-                <a16:creationId xmlns:a16="http://schemas.microsoft.com/office/drawing/2014/main" id="{E814D677-456A-45CE-9C66-A404C182E5BF}"/>
+                <a16:creationId xmlns:a16="http://schemas.microsoft.com/office/drawing/2014/main" id="{38F71EE6-05BE-44D3-AD05-247CDAF29B7C}"/>
               </a:ext>
             </a:extLst>
           </p:cNvPr>
@@ -4329,7 +4542,7 @@
           <p:cNvPr id="7" name="Slide Number Placeholder 6">
             <a:extLst xmlns:a="http://schemas.openxmlformats.org/drawingml/2006/main">
               <a:ext uri="{FF2B5EF4-FFF2-40B4-BE49-F238E27FC236}">
-                <a16:creationId xmlns:a16="http://schemas.microsoft.com/office/drawing/2014/main" id="{18FE7856-1264-48F1-AC1B-3DF54FF84D5B}"/>
+                <a16:creationId xmlns:a16="http://schemas.microsoft.com/office/drawing/2014/main" id="{96245B22-9814-4B4B-A85C-5954DB2E5348}"/>
               </a:ext>
             </a:extLst>
           </p:cNvPr>
@@ -4374,7 +4587,7 @@
           <p:cNvPr id="2" name="Title 1">
             <a:extLst xmlns:a="http://schemas.openxmlformats.org/drawingml/2006/main">
               <a:ext uri="{FF2B5EF4-FFF2-40B4-BE49-F238E27FC236}">
-                <a16:creationId xmlns:a16="http://schemas.microsoft.com/office/drawing/2014/main" id="{43AF2D90-1016-496A-94F3-F19CEEFCE59D}"/>
+                <a16:creationId xmlns:a16="http://schemas.microsoft.com/office/drawing/2014/main" id="{CEC6145C-0E2A-4BE5-BCD8-0ADA95CD1187}"/>
               </a:ext>
             </a:extLst>
           </p:cNvPr>
@@ -4411,7 +4624,7 @@
           <p:cNvPr id="3" name="Picture Placeholder 2">
             <a:extLst xmlns:a="http://schemas.openxmlformats.org/drawingml/2006/main">
               <a:ext uri="{FF2B5EF4-FFF2-40B4-BE49-F238E27FC236}">
-                <a16:creationId xmlns:a16="http://schemas.microsoft.com/office/drawing/2014/main" id="{329679D5-A0AB-4530-8C74-1314BCC92A46}"/>
+                <a16:creationId xmlns:a16="http://schemas.microsoft.com/office/drawing/2014/main" id="{7EC48C25-2FE0-487B-BDBA-0C606A1A878F}"/>
               </a:ext>
             </a:extLst>
           </p:cNvPr>
@@ -4480,7 +4693,7 @@
           <p:cNvPr id="4" name="Text Placeholder 3">
             <a:extLst xmlns:a="http://schemas.openxmlformats.org/drawingml/2006/main">
               <a:ext uri="{FF2B5EF4-FFF2-40B4-BE49-F238E27FC236}">
-                <a16:creationId xmlns:a16="http://schemas.microsoft.com/office/drawing/2014/main" id="{D5B8D47B-100C-4E1C-A4F9-D63E4E754176}"/>
+                <a16:creationId xmlns:a16="http://schemas.microsoft.com/office/drawing/2014/main" id="{56B40923-3E8F-461F-80AF-84E5D4455592}"/>
               </a:ext>
             </a:extLst>
           </p:cNvPr>
@@ -4552,7 +4765,7 @@
           <p:cNvPr id="5" name="Date Placeholder 4">
             <a:extLst xmlns:a="http://schemas.openxmlformats.org/drawingml/2006/main">
               <a:ext uri="{FF2B5EF4-FFF2-40B4-BE49-F238E27FC236}">
-                <a16:creationId xmlns:a16="http://schemas.microsoft.com/office/drawing/2014/main" id="{CBC26EEF-2E9B-4257-A26C-0C096927F4DE}"/>
+                <a16:creationId xmlns:a16="http://schemas.microsoft.com/office/drawing/2014/main" id="{21ECD8E2-65A6-4300-B82D-D93B95A4560F}"/>
               </a:ext>
             </a:extLst>
           </p:cNvPr>
@@ -4580,7 +4793,7 @@
           <p:cNvPr id="6" name="Footer Placeholder 5">
             <a:extLst xmlns:a="http://schemas.openxmlformats.org/drawingml/2006/main">
               <a:ext uri="{FF2B5EF4-FFF2-40B4-BE49-F238E27FC236}">
-                <a16:creationId xmlns:a16="http://schemas.microsoft.com/office/drawing/2014/main" id="{E528057E-EE66-463F-84B2-C16F1D835708}"/>
+                <a16:creationId xmlns:a16="http://schemas.microsoft.com/office/drawing/2014/main" id="{AABC6BAE-C32E-4FD4-BF41-57D540430C8C}"/>
               </a:ext>
             </a:extLst>
           </p:cNvPr>
@@ -4605,7 +4818,7 @@
           <p:cNvPr id="7" name="Slide Number Placeholder 6">
             <a:extLst xmlns:a="http://schemas.openxmlformats.org/drawingml/2006/main">
               <a:ext uri="{FF2B5EF4-FFF2-40B4-BE49-F238E27FC236}">
-                <a16:creationId xmlns:a16="http://schemas.microsoft.com/office/drawing/2014/main" id="{E67F1CF1-D859-45FD-9D5F-B7980F0E8575}"/>
+                <a16:creationId xmlns:a16="http://schemas.microsoft.com/office/drawing/2014/main" id="{603616F6-6EA1-4AFF-9AAD-B9C7854303E4}"/>
               </a:ext>
             </a:extLst>
           </p:cNvPr>
@@ -4655,7 +4868,7 @@
           <p:cNvPr id="2" name="Title Placeholder 1">
             <a:extLst xmlns:a="http://schemas.openxmlformats.org/drawingml/2006/main">
               <a:ext uri="{FF2B5EF4-FFF2-40B4-BE49-F238E27FC236}">
-                <a16:creationId xmlns:a16="http://schemas.microsoft.com/office/drawing/2014/main" id="{1D510F36-C518-4180-AC2C-16D9B91E0E16}"/>
+                <a16:creationId xmlns:a16="http://schemas.microsoft.com/office/drawing/2014/main" id="{1FC23F82-8880-4B28-B3DB-E5CDFDE7F008}"/>
               </a:ext>
             </a:extLst>
           </p:cNvPr>
@@ -4690,7 +4903,7 @@
           <p:cNvPr id="3" name="Text Placeholder 2">
             <a:extLst xmlns:a="http://schemas.openxmlformats.org/drawingml/2006/main">
               <a:ext uri="{FF2B5EF4-FFF2-40B4-BE49-F238E27FC236}">
-                <a16:creationId xmlns:a16="http://schemas.microsoft.com/office/drawing/2014/main" id="{67D09A65-5670-4410-8030-3B2681C48857}"/>
+                <a16:creationId xmlns:a16="http://schemas.microsoft.com/office/drawing/2014/main" id="{9C747055-97B1-48CB-B0D5-861C14FC171D}"/>
               </a:ext>
             </a:extLst>
           </p:cNvPr>
@@ -4763,7 +4976,7 @@
           <p:cNvPr id="4" name="Date Placeholder 3">
             <a:extLst xmlns:a="http://schemas.openxmlformats.org/drawingml/2006/main">
               <a:ext uri="{FF2B5EF4-FFF2-40B4-BE49-F238E27FC236}">
-                <a16:creationId xmlns:a16="http://schemas.microsoft.com/office/drawing/2014/main" id="{FACB6695-63ED-42E7-A5BB-DA2AFF144BAB}"/>
+                <a16:creationId xmlns:a16="http://schemas.microsoft.com/office/drawing/2014/main" id="{E544723A-E22B-4054-A602-99B45B1E7E4D}"/>
               </a:ext>
             </a:extLst>
           </p:cNvPr>
@@ -4810,7 +5023,7 @@
           <p:cNvPr id="5" name="Footer Placeholder 4">
             <a:extLst xmlns:a="http://schemas.openxmlformats.org/drawingml/2006/main">
               <a:ext uri="{FF2B5EF4-FFF2-40B4-BE49-F238E27FC236}">
-                <a16:creationId xmlns:a16="http://schemas.microsoft.com/office/drawing/2014/main" id="{D9A620C5-FD82-4E57-8C45-192E31FA9F26}"/>
+                <a16:creationId xmlns:a16="http://schemas.microsoft.com/office/drawing/2014/main" id="{D9ABCD69-8908-4AA7-B40B-BD3071FBC8CD}"/>
               </a:ext>
             </a:extLst>
           </p:cNvPr>
@@ -4854,7 +5067,7 @@
           <p:cNvPr id="6" name="Slide Number Placeholder 5">
             <a:extLst xmlns:a="http://schemas.openxmlformats.org/drawingml/2006/main">
               <a:ext uri="{FF2B5EF4-FFF2-40B4-BE49-F238E27FC236}">
-                <a16:creationId xmlns:a16="http://schemas.microsoft.com/office/drawing/2014/main" id="{2D0D041F-0AC9-448A-96A3-4F06A22FB8DF}"/>
+                <a16:creationId xmlns:a16="http://schemas.microsoft.com/office/drawing/2014/main" id="{46A9E303-8A90-4CBB-839C-6D46D4E39C2B}"/>
               </a:ext>
             </a:extLst>
           </p:cNvPr>
@@ -4901,7 +5114,7 @@
           <p:cNvPr id="11" name="Picture 10">
             <a:extLst xmlns:a="http://schemas.openxmlformats.org/drawingml/2006/main">
               <a:ext uri="{FF2B5EF4-FFF2-40B4-BE49-F238E27FC236}">
-                <a16:creationId xmlns:a16="http://schemas.microsoft.com/office/drawing/2014/main" id="{6C4C9DA5-A86F-4424-B383-23C7EA211EBD}"/>
+                <a16:creationId xmlns:a16="http://schemas.microsoft.com/office/drawing/2014/main" id="{8CE071C9-AF47-49EE-9E51-C98C79C30719}"/>
               </a:ext>
             </a:extLst>
           </p:cNvPr>
@@ -4911,7 +5124,7 @@
           <p:nvPr/>
         </p:nvPicPr>
         <p:blipFill>
-          <a:blip xmlns:r="http://schemas.openxmlformats.org/officeDocument/2006/relationships" xmlns:a="http://schemas.openxmlformats.org/drawingml/2006/main" r:embed="R184999c931dd473f"/>
+          <a:blip xmlns:r="http://schemas.openxmlformats.org/officeDocument/2006/relationships" xmlns:a="http://schemas.openxmlformats.org/drawingml/2006/main" r:embed="R50a5f7c4c4254569"/>
           <a:stretch xmlns:a="http://schemas.openxmlformats.org/drawingml/2006/main">
             <a:fillRect l="0" t="0" r="0" b="0"/>
           </a:stretch>
@@ -4930,17 +5143,17 @@
   </p:cSld>
   <p:clrMap bg1="lt1" tx1="dk1" bg2="lt2" tx2="dk2" accent1="accent1" accent2="accent2" accent3="accent3" accent4="accent4" accent5="accent5" accent6="accent6" hlink="hlink" folHlink="folHlink"/>
   <p:sldLayoutIdLst>
-    <p:sldLayoutId xmlns:r="http://schemas.openxmlformats.org/officeDocument/2006/relationships" id="2147483649" r:id="R0e35534195374af8"/>
-    <p:sldLayoutId xmlns:r="http://schemas.openxmlformats.org/officeDocument/2006/relationships" id="2147483650" r:id="Rb3bb6e59432d4ab4"/>
-    <p:sldLayoutId xmlns:r="http://schemas.openxmlformats.org/officeDocument/2006/relationships" id="2147483651" r:id="R537bb5c1d17b4f36"/>
-    <p:sldLayoutId xmlns:r="http://schemas.openxmlformats.org/officeDocument/2006/relationships" id="2147483652" r:id="R085fb12e0a8f4e02"/>
-    <p:sldLayoutId xmlns:r="http://schemas.openxmlformats.org/officeDocument/2006/relationships" id="2147483653" r:id="R4e62e6f69fd94371"/>
-    <p:sldLayoutId xmlns:r="http://schemas.openxmlformats.org/officeDocument/2006/relationships" id="2147483654" r:id="Rfe4e5cfe2c464d35"/>
-    <p:sldLayoutId xmlns:r="http://schemas.openxmlformats.org/officeDocument/2006/relationships" id="2147483655" r:id="Ra1320d5471af4c0f"/>
-    <p:sldLayoutId xmlns:r="http://schemas.openxmlformats.org/officeDocument/2006/relationships" id="2147483656" r:id="Rd29f1170cc954738"/>
-    <p:sldLayoutId xmlns:r="http://schemas.openxmlformats.org/officeDocument/2006/relationships" id="2147483657" r:id="R92d5c120fbd1421d"/>
-    <p:sldLayoutId xmlns:r="http://schemas.openxmlformats.org/officeDocument/2006/relationships" id="2147483658" r:id="Rb93babe3861b49e5"/>
-    <p:sldLayoutId xmlns:r="http://schemas.openxmlformats.org/officeDocument/2006/relationships" id="2147483659" r:id="R8a06fff9a29e4021"/>
+    <p:sldLayoutId xmlns:r="http://schemas.openxmlformats.org/officeDocument/2006/relationships" id="2147483649" r:id="Rb17ca1bd9c9d4e25"/>
+    <p:sldLayoutId xmlns:r="http://schemas.openxmlformats.org/officeDocument/2006/relationships" id="2147483650" r:id="Ra7429f620c0f46e8"/>
+    <p:sldLayoutId xmlns:r="http://schemas.openxmlformats.org/officeDocument/2006/relationships" id="2147483651" r:id="R574665c149644bf8"/>
+    <p:sldLayoutId xmlns:r="http://schemas.openxmlformats.org/officeDocument/2006/relationships" id="2147483652" r:id="R84e62f67a99a4e99"/>
+    <p:sldLayoutId xmlns:r="http://schemas.openxmlformats.org/officeDocument/2006/relationships" id="2147483653" r:id="Rf1f2ac2e98df4742"/>
+    <p:sldLayoutId xmlns:r="http://schemas.openxmlformats.org/officeDocument/2006/relationships" id="2147483654" r:id="R67e6b0702be54e09"/>
+    <p:sldLayoutId xmlns:r="http://schemas.openxmlformats.org/officeDocument/2006/relationships" id="2147483655" r:id="R022f6e63166b407a"/>
+    <p:sldLayoutId xmlns:r="http://schemas.openxmlformats.org/officeDocument/2006/relationships" id="2147483656" r:id="R9ab5474404c24274"/>
+    <p:sldLayoutId xmlns:r="http://schemas.openxmlformats.org/officeDocument/2006/relationships" id="2147483657" r:id="R6e71c8a0e54b4494"/>
+    <p:sldLayoutId xmlns:r="http://schemas.openxmlformats.org/officeDocument/2006/relationships" id="2147483658" r:id="R45b10c6097ac4ad9"/>
+    <p:sldLayoutId xmlns:r="http://schemas.openxmlformats.org/officeDocument/2006/relationships" id="2147483659" r:id="R005d1a9d585d4cc4"/>
   </p:sldLayoutIdLst>
   <p:txStyles>
     <p:titleStyle>
@@ -5564,7 +5777,7 @@
           <p:cNvPr id="2" name="Content Placeholder 2">
             <a:extLst xmlns:a="http://schemas.openxmlformats.org/drawingml/2006/main">
               <a:ext uri="{FF2B5EF4-FFF2-40B4-BE49-F238E27FC236}">
-                <a16:creationId xmlns:a16="http://schemas.microsoft.com/office/drawing/2014/main" id="{2E03F15E-18FE-4E65-B556-CBCC35D79B6F}"/>
+                <a16:creationId xmlns:a16="http://schemas.microsoft.com/office/drawing/2014/main" id="{B471258F-4095-4468-B85C-B9BC9B4BEBB0}"/>
               </a:ext>
             </a:extLst>
           </p:cNvPr>
@@ -5584,7 +5797,7 @@
               <a:buNone/>
             </a:pPr>
             <a:r>
-              <a:t>The Item Editor shows every input.</a:t>
+              <a:t>Create one item with the required values.</a:t>
             </a:r>
           </a:p>
           <a:p xmlns:a="http://schemas.openxmlformats.org/drawingml/2006/main">
@@ -5592,7 +5805,7 @@
               <a:buNone/>
             </a:pPr>
             <a:r>
-              <a:t>The Submit button appears below the form.</a:t>
+              <a:t>Check its calculated total.</a:t>
             </a:r>
           </a:p>
         </p:txBody>
@@ -5625,7 +5838,7 @@
           <a:lstStyle xmlns:a="http://schemas.openxmlformats.org/drawingml/2006/main"/>
           <a:p xmlns:a="http://schemas.openxmlformats.org/drawingml/2006/main">
             <a:r>
-              <a:t>Step 16 Check</a:t>
+              <a:t>Step 12: What changed?</a:t>
             </a:r>
             <a:endParaRPr/>
           </a:p>
@@ -5636,7 +5849,7 @@
           <p:cNvPr id="4" name="">
             <a:extLst xmlns:a="http://schemas.openxmlformats.org/drawingml/2006/main">
               <a:ext uri="{FF2B5EF4-FFF2-40B4-BE49-F238E27FC236}">
-                <a16:creationId xmlns:a16="http://schemas.microsoft.com/office/drawing/2014/main" id="{AB4D3CE7-91D0-4DED-AAEF-CD93B5D22214}"/>
+                <a16:creationId xmlns:a16="http://schemas.microsoft.com/office/drawing/2014/main" id="{8A17A56D-2DC5-47A2-9A7E-5BA7477C263E}"/>
               </a:ext>
             </a:extLst>
           </p:cNvPr>
@@ -5646,13 +5859,13 @@
           <p:nvPr/>
         </p:nvPicPr>
         <p:blipFill>
-          <a:blip xmlns:r="http://schemas.openxmlformats.org/officeDocument/2006/relationships" xmlns:a="http://schemas.openxmlformats.org/drawingml/2006/main" r:embed="R092d55412ff8402e"/>
+          <a:blip xmlns:r="http://schemas.openxmlformats.org/officeDocument/2006/relationships" xmlns:a="http://schemas.openxmlformats.org/drawingml/2006/main" r:embed="Rc1c5460d40e841e4"/>
           <a:stretch xmlns:a="http://schemas.openxmlformats.org/drawingml/2006/main"/>
         </p:blipFill>
         <p:spPr>
           <a:xfrm xmlns:a="http://schemas.openxmlformats.org/drawingml/2006/main">
-            <a:off x="3133823" y="3190875"/>
-            <a:ext cx="5924355" cy="3048000"/>
+            <a:off x="2667000" y="3397063"/>
+            <a:ext cx="6858000" cy="2635624"/>
           </a:xfrm>
           <a:prstGeom xmlns:a="http://schemas.openxmlformats.org/drawingml/2006/main" prst="rect">
             <a:avLst/>
@@ -5662,7 +5875,7 @@
     </p:spTree>
     <p:extLst>
       <p:ext uri="{BB962C8B-B14F-4D97-AF65-F5344CB8AC3E}">
-        <p14:creationId xmlns:p14="http://schemas.microsoft.com/office/powerpoint/2010/main" val="1407055801"/>
+        <p14:creationId xmlns:p14="http://schemas.microsoft.com/office/powerpoint/2010/main" val="2096564738"/>
       </p:ext>
     </p:extLst>
   </p:cSld>
@@ -5686,7 +5899,7 @@
           <p:cNvPr id="2" name="Content Placeholder 2">
             <a:extLst xmlns:a="http://schemas.openxmlformats.org/drawingml/2006/main">
               <a:ext uri="{FF2B5EF4-FFF2-40B4-BE49-F238E27FC236}">
-                <a16:creationId xmlns:a16="http://schemas.microsoft.com/office/drawing/2014/main" id="{2E03F15E-18FE-4E65-B556-CBCC35D79B6F}"/>
+                <a16:creationId xmlns:a16="http://schemas.microsoft.com/office/drawing/2014/main" id="{B471258F-4095-4468-B85C-B9BC9B4BEBB0}"/>
               </a:ext>
             </a:extLst>
           </p:cNvPr>
@@ -5706,7 +5919,7 @@
               <a:buNone/>
             </a:pPr>
             <a:r>
-              <a:t>Shell lists the app destinations.</a:t>
+              <a:t>A vertical layout stacks the inputs.</a:t>
             </a:r>
           </a:p>
           <a:p xmlns:a="http://schemas.openxmlformats.org/drawingml/2006/main">
@@ -5714,7 +5927,7 @@
               <a:buNone/>
             </a:pPr>
             <a:r>
-              <a:t>A route opens the editor page.</a:t>
+              <a:t>A ScrollView keeps the form usable.</a:t>
             </a:r>
           </a:p>
         </p:txBody>
@@ -5747,7 +5960,7 @@
           <a:lstStyle xmlns:a="http://schemas.openxmlformats.org/drawingml/2006/main"/>
           <a:p xmlns:a="http://schemas.openxmlformats.org/drawingml/2006/main">
             <a:r>
-              <a:t>Step 20 Shell navigation</a:t>
+              <a:t>Step 16: Editor page layout</a:t>
             </a:r>
             <a:endParaRPr/>
           </a:p>
@@ -5756,7 +5969,7 @@
     </p:spTree>
     <p:extLst>
       <p:ext uri="{BB962C8B-B14F-4D97-AF65-F5344CB8AC3E}">
-        <p14:creationId xmlns:p14="http://schemas.microsoft.com/office/powerpoint/2010/main" val="861367073"/>
+        <p14:creationId xmlns:p14="http://schemas.microsoft.com/office/powerpoint/2010/main" val="875669802"/>
       </p:ext>
     </p:extLst>
   </p:cSld>
@@ -5780,7 +5993,7 @@
           <p:cNvPr id="2" name="Content Placeholder 2">
             <a:extLst xmlns:a="http://schemas.openxmlformats.org/drawingml/2006/main">
               <a:ext uri="{FF2B5EF4-FFF2-40B4-BE49-F238E27FC236}">
-                <a16:creationId xmlns:a16="http://schemas.microsoft.com/office/drawing/2014/main" id="{2E03F15E-18FE-4E65-B556-CBCC35D79B6F}"/>
+                <a16:creationId xmlns:a16="http://schemas.microsoft.com/office/drawing/2014/main" id="{B471258F-4095-4468-B85C-B9BC9B4BEBB0}"/>
               </a:ext>
             </a:extLst>
           </p:cNvPr>
@@ -5800,7 +6013,7 @@
               <a:buNone/>
             </a:pPr>
             <a:r>
-              <a:t>Open the editor through Shell.</a:t>
+              <a:t>The Item Editor shows every input.</a:t>
             </a:r>
           </a:p>
           <a:p xmlns:a="http://schemas.openxmlformats.org/drawingml/2006/main">
@@ -5808,7 +6021,7 @@
               <a:buNone/>
             </a:pPr>
             <a:r>
-              <a:t>Use Back to return to Home.</a:t>
+              <a:t>The Submit button appears below the form.</a:t>
             </a:r>
           </a:p>
         </p:txBody>
@@ -5841,7 +6054,7 @@
           <a:lstStyle xmlns:a="http://schemas.openxmlformats.org/drawingml/2006/main"/>
           <a:p xmlns:a="http://schemas.openxmlformats.org/drawingml/2006/main">
             <a:r>
-              <a:t>Step 20 Check</a:t>
+              <a:t>Step 16: What changed?</a:t>
             </a:r>
             <a:endParaRPr/>
           </a:p>
@@ -5852,7 +6065,7 @@
           <p:cNvPr id="4" name="">
             <a:extLst xmlns:a="http://schemas.openxmlformats.org/drawingml/2006/main">
               <a:ext uri="{FF2B5EF4-FFF2-40B4-BE49-F238E27FC236}">
-                <a16:creationId xmlns:a16="http://schemas.microsoft.com/office/drawing/2014/main" id="{4CDFC570-BB46-48C7-9A31-55486181A0EB}"/>
+                <a16:creationId xmlns:a16="http://schemas.microsoft.com/office/drawing/2014/main" id="{972EBE0F-076E-4B20-8EFF-BC2C7297EDC7}"/>
               </a:ext>
             </a:extLst>
           </p:cNvPr>
@@ -5862,7 +6075,7 @@
           <p:nvPr/>
         </p:nvPicPr>
         <p:blipFill>
-          <a:blip xmlns:r="http://schemas.openxmlformats.org/officeDocument/2006/relationships" xmlns:a="http://schemas.openxmlformats.org/drawingml/2006/main" r:embed="Rc62a82ee40374030"/>
+          <a:blip xmlns:r="http://schemas.openxmlformats.org/officeDocument/2006/relationships" xmlns:a="http://schemas.openxmlformats.org/drawingml/2006/main" r:embed="Ra3503b9bd8d84a08"/>
           <a:stretch xmlns:a="http://schemas.openxmlformats.org/drawingml/2006/main"/>
         </p:blipFill>
         <p:spPr>
@@ -5878,7 +6091,7 @@
     </p:spTree>
     <p:extLst>
       <p:ext uri="{BB962C8B-B14F-4D97-AF65-F5344CB8AC3E}">
-        <p14:creationId xmlns:p14="http://schemas.microsoft.com/office/powerpoint/2010/main" val="1692298759"/>
+        <p14:creationId xmlns:p14="http://schemas.microsoft.com/office/powerpoint/2010/main" val="450839971"/>
       </p:ext>
     </p:extLst>
   </p:cSld>
@@ -5902,7 +6115,7 @@
           <p:cNvPr id="2" name="Content Placeholder 2">
             <a:extLst xmlns:a="http://schemas.openxmlformats.org/drawingml/2006/main">
               <a:ext uri="{FF2B5EF4-FFF2-40B4-BE49-F238E27FC236}">
-                <a16:creationId xmlns:a16="http://schemas.microsoft.com/office/drawing/2014/main" id="{2E03F15E-18FE-4E65-B556-CBCC35D79B6F}"/>
+                <a16:creationId xmlns:a16="http://schemas.microsoft.com/office/drawing/2014/main" id="{B471258F-4095-4468-B85C-B9BC9B4BEBB0}"/>
               </a:ext>
             </a:extLst>
           </p:cNvPr>
@@ -5922,7 +6135,7 @@
               <a:buNone/>
             </a:pPr>
             <a:r>
-              <a:t>Check required text before calculation.</a:t>
+              <a:t>Shell lists the app destinations.</a:t>
             </a:r>
           </a:p>
           <a:p xmlns:a="http://schemas.openxmlformats.org/drawingml/2006/main">
@@ -5930,7 +6143,7 @@
               <a:buNone/>
             </a:pPr>
             <a:r>
-              <a:t>Use TryParse for numeric input.</a:t>
+              <a:t>A route opens the editor page.</a:t>
             </a:r>
           </a:p>
         </p:txBody>
@@ -5963,7 +6176,7 @@
           <a:lstStyle xmlns:a="http://schemas.openxmlformats.org/drawingml/2006/main"/>
           <a:p xmlns:a="http://schemas.openxmlformats.org/drawingml/2006/main">
             <a:r>
-              <a:t>Step 21 Input validation</a:t>
+              <a:t>Step 20: Shell navigation</a:t>
             </a:r>
             <a:endParaRPr/>
           </a:p>
@@ -5972,7 +6185,7 @@
     </p:spTree>
     <p:extLst>
       <p:ext uri="{BB962C8B-B14F-4D97-AF65-F5344CB8AC3E}">
-        <p14:creationId xmlns:p14="http://schemas.microsoft.com/office/powerpoint/2010/main" val="271993231"/>
+        <p14:creationId xmlns:p14="http://schemas.microsoft.com/office/powerpoint/2010/main" val="1296764358"/>
       </p:ext>
     </p:extLst>
   </p:cSld>
@@ -5996,7 +6209,7 @@
           <p:cNvPr id="2" name="Content Placeholder 2">
             <a:extLst xmlns:a="http://schemas.openxmlformats.org/drawingml/2006/main">
               <a:ext uri="{FF2B5EF4-FFF2-40B4-BE49-F238E27FC236}">
-                <a16:creationId xmlns:a16="http://schemas.microsoft.com/office/drawing/2014/main" id="{2E03F15E-18FE-4E65-B556-CBCC35D79B6F}"/>
+                <a16:creationId xmlns:a16="http://schemas.microsoft.com/office/drawing/2014/main" id="{B471258F-4095-4468-B85C-B9BC9B4BEBB0}"/>
               </a:ext>
             </a:extLst>
           </p:cNvPr>
@@ -6016,7 +6229,7 @@
               <a:buNone/>
             </a:pPr>
             <a:r>
-              <a:t>Invalid input shows an alert.</a:t>
+              <a:t>Open the editor through Shell.</a:t>
             </a:r>
           </a:p>
           <a:p xmlns:a="http://schemas.openxmlformats.org/drawingml/2006/main">
@@ -6024,7 +6237,7 @@
               <a:buNone/>
             </a:pPr>
             <a:r>
-              <a:t>Valid input produces a total.</a:t>
+              <a:t>Use Back to return to Home.</a:t>
             </a:r>
           </a:p>
         </p:txBody>
@@ -6057,7 +6270,7 @@
           <a:lstStyle xmlns:a="http://schemas.openxmlformats.org/drawingml/2006/main"/>
           <a:p xmlns:a="http://schemas.openxmlformats.org/drawingml/2006/main">
             <a:r>
-              <a:t>Step 21 Check</a:t>
+              <a:t>Step 20: What changed?</a:t>
             </a:r>
             <a:endParaRPr/>
           </a:p>
@@ -6068,7 +6281,7 @@
           <p:cNvPr id="4" name="">
             <a:extLst xmlns:a="http://schemas.openxmlformats.org/drawingml/2006/main">
               <a:ext uri="{FF2B5EF4-FFF2-40B4-BE49-F238E27FC236}">
-                <a16:creationId xmlns:a16="http://schemas.microsoft.com/office/drawing/2014/main" id="{D9F0C980-08A3-4B90-B6E4-39C99D6E64B8}"/>
+                <a16:creationId xmlns:a16="http://schemas.microsoft.com/office/drawing/2014/main" id="{1740F1F3-62A4-4F83-9908-90ED0D3C521C}"/>
               </a:ext>
             </a:extLst>
           </p:cNvPr>
@@ -6078,7 +6291,7 @@
           <p:nvPr/>
         </p:nvPicPr>
         <p:blipFill>
-          <a:blip xmlns:r="http://schemas.openxmlformats.org/officeDocument/2006/relationships" xmlns:a="http://schemas.openxmlformats.org/drawingml/2006/main" r:embed="R69b7ee9c6cd94e94"/>
+          <a:blip xmlns:r="http://schemas.openxmlformats.org/officeDocument/2006/relationships" xmlns:a="http://schemas.openxmlformats.org/drawingml/2006/main" r:embed="R2e1da2541da44594"/>
           <a:stretch xmlns:a="http://schemas.openxmlformats.org/drawingml/2006/main"/>
         </p:blipFill>
         <p:spPr>
@@ -6094,7 +6307,7 @@
     </p:spTree>
     <p:extLst>
       <p:ext uri="{BB962C8B-B14F-4D97-AF65-F5344CB8AC3E}">
-        <p14:creationId xmlns:p14="http://schemas.microsoft.com/office/powerpoint/2010/main" val="1006759057"/>
+        <p14:creationId xmlns:p14="http://schemas.microsoft.com/office/powerpoint/2010/main" val="2016909406"/>
       </p:ext>
     </p:extLst>
   </p:cSld>
@@ -6118,7 +6331,7 @@
           <p:cNvPr id="2" name="Content Placeholder 2">
             <a:extLst xmlns:a="http://schemas.openxmlformats.org/drawingml/2006/main">
               <a:ext uri="{FF2B5EF4-FFF2-40B4-BE49-F238E27FC236}">
-                <a16:creationId xmlns:a16="http://schemas.microsoft.com/office/drawing/2014/main" id="{2E03F15E-18FE-4E65-B556-CBCC35D79B6F}"/>
+                <a16:creationId xmlns:a16="http://schemas.microsoft.com/office/drawing/2014/main" id="{B471258F-4095-4468-B85C-B9BC9B4BEBB0}"/>
               </a:ext>
             </a:extLst>
           </p:cNvPr>
@@ -6138,7 +6351,7 @@
               <a:buNone/>
             </a:pPr>
             <a:r>
-              <a:t>Show the completed app workflow.</a:t>
+              <a:t>Check required text before calculation.</a:t>
             </a:r>
           </a:p>
           <a:p xmlns:a="http://schemas.openxmlformats.org/drawingml/2006/main">
@@ -6146,15 +6359,7 @@
               <a:buNone/>
             </a:pPr>
             <a:r>
-              <a:t>Explain which responsibility changed.</a:t>
-            </a:r>
-          </a:p>
-          <a:p xmlns:a="http://schemas.openxmlformats.org/drawingml/2006/main">
-            <a:pPr lvl="0">
-              <a:buNone/>
-            </a:pPr>
-            <a:r>
-              <a:t>Check the result before the next module.</a:t>
+              <a:t>Use TryParse for numeric input.</a:t>
             </a:r>
           </a:p>
         </p:txBody>
@@ -6187,7 +6392,7 @@
           <a:lstStyle xmlns:a="http://schemas.openxmlformats.org/drawingml/2006/main"/>
           <a:p xmlns:a="http://schemas.openxmlformats.org/drawingml/2006/main">
             <a:r>
-              <a:t>Module review</a:t>
+              <a:t>Step 21: Input validation</a:t>
             </a:r>
             <a:endParaRPr/>
           </a:p>
@@ -6196,7 +6401,333 @@
     </p:spTree>
     <p:extLst>
       <p:ext uri="{BB962C8B-B14F-4D97-AF65-F5344CB8AC3E}">
-        <p14:creationId xmlns:p14="http://schemas.microsoft.com/office/powerpoint/2010/main" val="537467416"/>
+        <p14:creationId xmlns:p14="http://schemas.microsoft.com/office/powerpoint/2010/main" val="1242431486"/>
+      </p:ext>
+    </p:extLst>
+  </p:cSld>
+</p:sld>
+</file>
+
+<file path=ppt/slides/slide16.xml><?xml version="1.0" encoding="utf-8"?>
+<p:sld xmlns:p="http://schemas.openxmlformats.org/presentationml/2006/main">
+  <p:cSld>
+    <p:spTree>
+      <p:nvGrpSpPr>
+        <p:cNvPr id="1" name=""/>
+        <p:cNvGrpSpPr/>
+        <p:nvPr/>
+      </p:nvGrpSpPr>
+      <p:grpSpPr>
+        <a:xfrm xmlns:a="http://schemas.openxmlformats.org/drawingml/2006/main"/>
+      </p:grpSpPr>
+      <p:sp>
+        <p:nvSpPr>
+          <p:cNvPr id="2" name="Content Placeholder 2">
+            <a:extLst xmlns:a="http://schemas.openxmlformats.org/drawingml/2006/main">
+              <a:ext uri="{FF2B5EF4-FFF2-40B4-BE49-F238E27FC236}">
+                <a16:creationId xmlns:a16="http://schemas.microsoft.com/office/drawing/2014/main" id="{B471258F-4095-4468-B85C-B9BC9B4BEBB0}"/>
+              </a:ext>
+            </a:extLst>
+          </p:cNvPr>
+          <p:cNvSpPr>
+            <a:spLocks xmlns:a="http://schemas.openxmlformats.org/drawingml/2006/main" noGrp="1"/>
+          </p:cNvSpPr>
+          <p:nvPr>
+            <p:ph idx="1"/>
+          </p:nvPr>
+        </p:nvSpPr>
+        <p:spPr/>
+        <p:txBody>
+          <a:bodyPr xmlns:a="http://schemas.openxmlformats.org/drawingml/2006/main"/>
+          <a:lstStyle xmlns:a="http://schemas.openxmlformats.org/drawingml/2006/main"/>
+          <a:p xmlns:a="http://schemas.openxmlformats.org/drawingml/2006/main">
+            <a:pPr lvl="0">
+              <a:buNone/>
+            </a:pPr>
+            <a:r>
+              <a:t>Invalid input shows an alert.</a:t>
+            </a:r>
+          </a:p>
+          <a:p xmlns:a="http://schemas.openxmlformats.org/drawingml/2006/main">
+            <a:pPr lvl="0">
+              <a:buNone/>
+            </a:pPr>
+            <a:r>
+              <a:t>Valid input produces a total.</a:t>
+            </a:r>
+          </a:p>
+        </p:txBody>
+      </p:sp>
+      <p:sp>
+        <p:nvSpPr>
+          <p:cNvPr id="3" name="Title Placeholder 1">
+            <a:extLst xmlns:a="http://schemas.openxmlformats.org/drawingml/2006/main">
+              <a:ext uri="{FF2B5EF4-FFF2-40B4-BE49-F238E27FC236}">
+                <a16:creationId xmlns:a16="http://schemas.microsoft.com/office/drawing/2014/main" id="{2DF4F548-EDEF-186D-6633-AF1ABC814BC1}"/>
+              </a:ext>
+            </a:extLst>
+          </p:cNvPr>
+          <p:cNvSpPr>
+            <a:spLocks xmlns:a="http://schemas.openxmlformats.org/drawingml/2006/main" noGrp="1"/>
+          </p:cNvSpPr>
+          <p:nvPr>
+            <p:ph type="title" idx="0"/>
+          </p:nvPr>
+        </p:nvSpPr>
+        <p:spPr>
+          <a:prstGeom xmlns:a="http://schemas.openxmlformats.org/drawingml/2006/main" prst="rect">
+            <a:avLst/>
+          </a:prstGeom>
+        </p:spPr>
+        <p:txBody>
+          <a:bodyPr xmlns:a="http://schemas.openxmlformats.org/drawingml/2006/main" vert="horz" lIns="91440" tIns="45720" rIns="91440" bIns="45720" anchor="ctr">
+            <a:normAutofit fontScale="100000"/>
+          </a:bodyPr>
+          <a:lstStyle xmlns:a="http://schemas.openxmlformats.org/drawingml/2006/main"/>
+          <a:p xmlns:a="http://schemas.openxmlformats.org/drawingml/2006/main">
+            <a:r>
+              <a:t>Step 21: What changed?</a:t>
+            </a:r>
+            <a:endParaRPr/>
+          </a:p>
+        </p:txBody>
+      </p:sp>
+      <p:pic>
+        <p:nvPicPr>
+          <p:cNvPr id="4" name="">
+            <a:extLst xmlns:a="http://schemas.openxmlformats.org/drawingml/2006/main">
+              <a:ext uri="{FF2B5EF4-FFF2-40B4-BE49-F238E27FC236}">
+                <a16:creationId xmlns:a16="http://schemas.microsoft.com/office/drawing/2014/main" id="{2B134C33-BB66-4A57-870E-1886C68CBA01}"/>
+              </a:ext>
+            </a:extLst>
+          </p:cNvPr>
+          <p:cNvPicPr>
+            <a:picLocks xmlns:a="http://schemas.openxmlformats.org/drawingml/2006/main" noChangeAspect="1"/>
+          </p:cNvPicPr>
+          <p:nvPr/>
+        </p:nvPicPr>
+        <p:blipFill>
+          <a:blip xmlns:r="http://schemas.openxmlformats.org/officeDocument/2006/relationships" xmlns:a="http://schemas.openxmlformats.org/drawingml/2006/main" r:embed="Re8726e461aac4dbd"/>
+          <a:stretch xmlns:a="http://schemas.openxmlformats.org/drawingml/2006/main"/>
+        </p:blipFill>
+        <p:spPr>
+          <a:xfrm xmlns:a="http://schemas.openxmlformats.org/drawingml/2006/main">
+            <a:off x="3133823" y="3190875"/>
+            <a:ext cx="5924355" cy="3048000"/>
+          </a:xfrm>
+          <a:prstGeom xmlns:a="http://schemas.openxmlformats.org/drawingml/2006/main" prst="rect">
+            <a:avLst/>
+          </a:prstGeom>
+        </p:spPr>
+      </p:pic>
+    </p:spTree>
+    <p:extLst>
+      <p:ext uri="{BB962C8B-B14F-4D97-AF65-F5344CB8AC3E}">
+        <p14:creationId xmlns:p14="http://schemas.microsoft.com/office/powerpoint/2010/main" val="1208156659"/>
+      </p:ext>
+    </p:extLst>
+  </p:cSld>
+</p:sld>
+</file>
+
+<file path=ppt/slides/slide17.xml><?xml version="1.0" encoding="utf-8"?>
+<p:sld xmlns:p="http://schemas.openxmlformats.org/presentationml/2006/main">
+  <p:cSld>
+    <p:spTree>
+      <p:nvGrpSpPr>
+        <p:cNvPr id="1" name=""/>
+        <p:cNvGrpSpPr/>
+        <p:nvPr/>
+      </p:nvGrpSpPr>
+      <p:grpSpPr>
+        <a:xfrm xmlns:a="http://schemas.openxmlformats.org/drawingml/2006/main"/>
+      </p:grpSpPr>
+      <p:sp>
+        <p:nvSpPr>
+          <p:cNvPr id="2" name="Content Placeholder 2">
+            <a:extLst xmlns:a="http://schemas.openxmlformats.org/drawingml/2006/main">
+              <a:ext uri="{FF2B5EF4-FFF2-40B4-BE49-F238E27FC236}">
+                <a16:creationId xmlns:a16="http://schemas.microsoft.com/office/drawing/2014/main" id="{B471258F-4095-4468-B85C-B9BC9B4BEBB0}"/>
+              </a:ext>
+            </a:extLst>
+          </p:cNvPr>
+          <p:cNvSpPr>
+            <a:spLocks xmlns:a="http://schemas.openxmlformats.org/drawingml/2006/main" noGrp="1"/>
+          </p:cNvSpPr>
+          <p:nvPr>
+            <p:ph idx="1"/>
+          </p:nvPr>
+        </p:nvSpPr>
+        <p:spPr/>
+        <p:txBody>
+          <a:bodyPr xmlns:a="http://schemas.openxmlformats.org/drawingml/2006/main"/>
+          <a:lstStyle xmlns:a="http://schemas.openxmlformats.org/drawingml/2006/main"/>
+          <a:p xmlns:a="http://schemas.openxmlformats.org/drawingml/2006/main">
+            <a:pPr lvl="0">
+              <a:buNone/>
+            </a:pPr>
+            <a:r>
+              <a:t>I can locate a page, its C# file, and a resource.</a:t>
+            </a:r>
+          </a:p>
+          <a:p xmlns:a="http://schemas.openxmlformats.org/drawingml/2006/main">
+            <a:pPr lvl="0">
+              <a:buNone/>
+            </a:pPr>
+            <a:r>
+              <a:t>I can explain how Shell opens the editor.</a:t>
+            </a:r>
+          </a:p>
+          <a:p xmlns:a="http://schemas.openxmlformats.org/drawingml/2006/main">
+            <a:pPr lvl="0">
+              <a:buNone/>
+            </a:pPr>
+            <a:r>
+              <a:t>I can trace a valid input to its total.</a:t>
+            </a:r>
+          </a:p>
+        </p:txBody>
+      </p:sp>
+      <p:sp>
+        <p:nvSpPr>
+          <p:cNvPr id="3" name="Title Placeholder 1">
+            <a:extLst xmlns:a="http://schemas.openxmlformats.org/drawingml/2006/main">
+              <a:ext uri="{FF2B5EF4-FFF2-40B4-BE49-F238E27FC236}">
+                <a16:creationId xmlns:a16="http://schemas.microsoft.com/office/drawing/2014/main" id="{2DF4F548-EDEF-186D-6633-AF1ABC814BC1}"/>
+              </a:ext>
+            </a:extLst>
+          </p:cNvPr>
+          <p:cNvSpPr>
+            <a:spLocks xmlns:a="http://schemas.openxmlformats.org/drawingml/2006/main" noGrp="1"/>
+          </p:cNvSpPr>
+          <p:nvPr>
+            <p:ph type="title" idx="0"/>
+          </p:nvPr>
+        </p:nvSpPr>
+        <p:spPr>
+          <a:prstGeom xmlns:a="http://schemas.openxmlformats.org/drawingml/2006/main" prst="rect">
+            <a:avLst/>
+          </a:prstGeom>
+        </p:spPr>
+        <p:txBody>
+          <a:bodyPr xmlns:a="http://schemas.openxmlformats.org/drawingml/2006/main" vert="horz" lIns="91440" tIns="45720" rIns="91440" bIns="45720" anchor="ctr">
+            <a:normAutofit fontScale="100000"/>
+          </a:bodyPr>
+          <a:lstStyle xmlns:a="http://schemas.openxmlformats.org/drawingml/2006/main"/>
+          <a:p xmlns:a="http://schemas.openxmlformats.org/drawingml/2006/main">
+            <a:r>
+              <a:t>What you can now explain</a:t>
+            </a:r>
+            <a:endParaRPr/>
+          </a:p>
+        </p:txBody>
+      </p:sp>
+    </p:spTree>
+    <p:extLst>
+      <p:ext uri="{BB962C8B-B14F-4D97-AF65-F5344CB8AC3E}">
+        <p14:creationId xmlns:p14="http://schemas.microsoft.com/office/powerpoint/2010/main" val="47077311"/>
+      </p:ext>
+    </p:extLst>
+  </p:cSld>
+</p:sld>
+</file>
+
+<file path=ppt/slides/slide18.xml><?xml version="1.0" encoding="utf-8"?>
+<p:sld xmlns:p="http://schemas.openxmlformats.org/presentationml/2006/main">
+  <p:cSld>
+    <p:spTree>
+      <p:nvGrpSpPr>
+        <p:cNvPr id="1" name=""/>
+        <p:cNvGrpSpPr/>
+        <p:nvPr/>
+      </p:nvGrpSpPr>
+      <p:grpSpPr>
+        <a:xfrm xmlns:a="http://schemas.openxmlformats.org/drawingml/2006/main"/>
+      </p:grpSpPr>
+      <p:sp>
+        <p:nvSpPr>
+          <p:cNvPr id="2" name="Content Placeholder 2">
+            <a:extLst xmlns:a="http://schemas.openxmlformats.org/drawingml/2006/main">
+              <a:ext uri="{FF2B5EF4-FFF2-40B4-BE49-F238E27FC236}">
+                <a16:creationId xmlns:a16="http://schemas.microsoft.com/office/drawing/2014/main" id="{B471258F-4095-4468-B85C-B9BC9B4BEBB0}"/>
+              </a:ext>
+            </a:extLst>
+          </p:cNvPr>
+          <p:cNvSpPr>
+            <a:spLocks xmlns:a="http://schemas.openxmlformats.org/drawingml/2006/main" noGrp="1"/>
+          </p:cNvSpPr>
+          <p:nvPr>
+            <p:ph idx="1"/>
+          </p:nvPr>
+        </p:nvSpPr>
+        <p:spPr/>
+        <p:txBody>
+          <a:bodyPr xmlns:a="http://schemas.openxmlformats.org/drawingml/2006/main"/>
+          <a:lstStyle xmlns:a="http://schemas.openxmlformats.org/drawingml/2006/main"/>
+          <a:p xmlns:a="http://schemas.openxmlformats.org/drawingml/2006/main">
+            <a:pPr lvl="0">
+              <a:buNone/>
+            </a:pPr>
+            <a:r>
+              <a:t>XAML basics and Shell</a:t>
+            </a:r>
+          </a:p>
+          <a:p xmlns:a="http://schemas.openxmlformats.org/drawingml/2006/main">
+            <a:pPr lvl="0">
+              <a:buNone/>
+            </a:pPr>
+            <a:r>
+              <a:t>Search Microsoft Learn for this topic.</a:t>
+            </a:r>
+          </a:p>
+          <a:p xmlns:a="http://schemas.openxmlformats.org/drawingml/2006/main">
+            <a:pPr lvl="0">
+              <a:buNone/>
+            </a:pPr>
+            <a:r>
+              <a:t>Try one example in a small test page.</a:t>
+            </a:r>
+          </a:p>
+        </p:txBody>
+      </p:sp>
+      <p:sp>
+        <p:nvSpPr>
+          <p:cNvPr id="3" name="Title Placeholder 1">
+            <a:extLst xmlns:a="http://schemas.openxmlformats.org/drawingml/2006/main">
+              <a:ext uri="{FF2B5EF4-FFF2-40B4-BE49-F238E27FC236}">
+                <a16:creationId xmlns:a16="http://schemas.microsoft.com/office/drawing/2014/main" id="{2DF4F548-EDEF-186D-6633-AF1ABC814BC1}"/>
+              </a:ext>
+            </a:extLst>
+          </p:cNvPr>
+          <p:cNvSpPr>
+            <a:spLocks xmlns:a="http://schemas.openxmlformats.org/drawingml/2006/main" noGrp="1"/>
+          </p:cNvSpPr>
+          <p:nvPr>
+            <p:ph type="title" idx="0"/>
+          </p:nvPr>
+        </p:nvSpPr>
+        <p:spPr>
+          <a:prstGeom xmlns:a="http://schemas.openxmlformats.org/drawingml/2006/main" prst="rect">
+            <a:avLst/>
+          </a:prstGeom>
+        </p:spPr>
+        <p:txBody>
+          <a:bodyPr xmlns:a="http://schemas.openxmlformats.org/drawingml/2006/main" vert="horz" lIns="91440" tIns="45720" rIns="91440" bIns="45720" anchor="ctr">
+            <a:normAutofit fontScale="100000"/>
+          </a:bodyPr>
+          <a:lstStyle xmlns:a="http://schemas.openxmlformats.org/drawingml/2006/main"/>
+          <a:p xmlns:a="http://schemas.openxmlformats.org/drawingml/2006/main">
+            <a:r>
+              <a:t>Read more in MAUI documentation</a:t>
+            </a:r>
+            <a:endParaRPr/>
+          </a:p>
+        </p:txBody>
+      </p:sp>
+    </p:spTree>
+    <p:extLst>
+      <p:ext uri="{BB962C8B-B14F-4D97-AF65-F5344CB8AC3E}">
+        <p14:creationId xmlns:p14="http://schemas.microsoft.com/office/powerpoint/2010/main" val="1775835954"/>
       </p:ext>
     </p:extLst>
   </p:cSld>
@@ -6220,7 +6751,7 @@
           <p:cNvPr id="2" name="Content Placeholder 2">
             <a:extLst xmlns:a="http://schemas.openxmlformats.org/drawingml/2006/main">
               <a:ext uri="{FF2B5EF4-FFF2-40B4-BE49-F238E27FC236}">
-                <a16:creationId xmlns:a16="http://schemas.microsoft.com/office/drawing/2014/main" id="{2E03F15E-18FE-4E65-B556-CBCC35D79B6F}"/>
+                <a16:creationId xmlns:a16="http://schemas.microsoft.com/office/drawing/2014/main" id="{B471258F-4095-4468-B85C-B9BC9B4BEBB0}"/>
               </a:ext>
             </a:extLst>
           </p:cNvPr>
@@ -6289,7 +6820,7 @@
           <a:lstStyle xmlns:a="http://schemas.openxmlformats.org/drawingml/2006/main"/>
           <a:p xmlns:a="http://schemas.openxmlformats.org/drawingml/2006/main">
             <a:r>
-              <a:t>Exercise overview</a:t>
+              <a:t>What you will build</a:t>
             </a:r>
             <a:endParaRPr/>
           </a:p>
@@ -6298,7 +6829,7 @@
     </p:spTree>
     <p:extLst>
       <p:ext uri="{BB962C8B-B14F-4D97-AF65-F5344CB8AC3E}">
-        <p14:creationId xmlns:p14="http://schemas.microsoft.com/office/powerpoint/2010/main" val="1922889032"/>
+        <p14:creationId xmlns:p14="http://schemas.microsoft.com/office/powerpoint/2010/main" val="1535408923"/>
       </p:ext>
     </p:extLst>
   </p:cSld>
@@ -6322,7 +6853,7 @@
           <p:cNvPr id="2" name="Content Placeholder 2">
             <a:extLst xmlns:a="http://schemas.openxmlformats.org/drawingml/2006/main">
               <a:ext uri="{FF2B5EF4-FFF2-40B4-BE49-F238E27FC236}">
-                <a16:creationId xmlns:a16="http://schemas.microsoft.com/office/drawing/2014/main" id="{2E03F15E-18FE-4E65-B556-CBCC35D79B6F}"/>
+                <a16:creationId xmlns:a16="http://schemas.microsoft.com/office/drawing/2014/main" id="{B471258F-4095-4468-B85C-B9BC9B4BEBB0}"/>
               </a:ext>
             </a:extLst>
           </p:cNvPr>
@@ -6342,7 +6873,7 @@
               <a:buNone/>
             </a:pPr>
             <a:r>
-              <a:t>XAML defines the visible page.</a:t>
+              <a:t>A ContentPage describes one screen in XAML.</a:t>
             </a:r>
           </a:p>
           <a:p xmlns:a="http://schemas.openxmlformats.org/drawingml/2006/main">
@@ -6350,7 +6881,7 @@
               <a:buNone/>
             </a:pPr>
             <a:r>
-              <a:t>C# code handles page behavior.</a:t>
+              <a:t>Its C# file responds to events and uses C# objects.</a:t>
             </a:r>
           </a:p>
           <a:p xmlns:a="http://schemas.openxmlformats.org/drawingml/2006/main">
@@ -6358,7 +6889,7 @@
               <a:buNone/>
             </a:pPr>
             <a:r>
-              <a:t>Resources holds images and app artwork.</a:t>
+              <a:t>AppShell gives the screens a navigation structure.</a:t>
             </a:r>
           </a:p>
         </p:txBody>
@@ -6391,16 +6922,44 @@
           <a:lstStyle xmlns:a="http://schemas.openxmlformats.org/drawingml/2006/main"/>
           <a:p xmlns:a="http://schemas.openxmlformats.org/drawingml/2006/main">
             <a:r>
-              <a:t>Step 1 MAUI project files</a:t>
+              <a:t>How a MAUI app fits together</a:t>
             </a:r>
             <a:endParaRPr/>
           </a:p>
         </p:txBody>
       </p:sp>
+      <p:pic>
+        <p:nvPicPr>
+          <p:cNvPr id="4" name="">
+            <a:extLst xmlns:a="http://schemas.openxmlformats.org/drawingml/2006/main">
+              <a:ext uri="{FF2B5EF4-FFF2-40B4-BE49-F238E27FC236}">
+                <a16:creationId xmlns:a16="http://schemas.microsoft.com/office/drawing/2014/main" id="{A7AEE6F3-0EFB-4A68-ADBC-1A0EF7720EE2}"/>
+              </a:ext>
+            </a:extLst>
+          </p:cNvPr>
+          <p:cNvPicPr>
+            <a:picLocks xmlns:a="http://schemas.openxmlformats.org/drawingml/2006/main" noChangeAspect="1"/>
+          </p:cNvPicPr>
+          <p:nvPr/>
+        </p:nvPicPr>
+        <p:blipFill>
+          <a:blip xmlns:r="http://schemas.openxmlformats.org/officeDocument/2006/relationships" xmlns:a="http://schemas.openxmlformats.org/drawingml/2006/main" r:embed="R43e71ba7b12f4a12"/>
+          <a:stretch xmlns:a="http://schemas.openxmlformats.org/drawingml/2006/main"/>
+        </p:blipFill>
+        <p:spPr>
+          <a:xfrm xmlns:a="http://schemas.openxmlformats.org/drawingml/2006/main">
+            <a:off x="3133823" y="3190875"/>
+            <a:ext cx="5924355" cy="3048000"/>
+          </a:xfrm>
+          <a:prstGeom xmlns:a="http://schemas.openxmlformats.org/drawingml/2006/main" prst="rect">
+            <a:avLst/>
+          </a:prstGeom>
+        </p:spPr>
+      </p:pic>
     </p:spTree>
     <p:extLst>
       <p:ext uri="{BB962C8B-B14F-4D97-AF65-F5344CB8AC3E}">
-        <p14:creationId xmlns:p14="http://schemas.microsoft.com/office/powerpoint/2010/main" val="57368980"/>
+        <p14:creationId xmlns:p14="http://schemas.microsoft.com/office/powerpoint/2010/main" val="1342335417"/>
       </p:ext>
     </p:extLst>
   </p:cSld>
@@ -6424,7 +6983,7 @@
           <p:cNvPr id="2" name="Content Placeholder 2">
             <a:extLst xmlns:a="http://schemas.openxmlformats.org/drawingml/2006/main">
               <a:ext uri="{FF2B5EF4-FFF2-40B4-BE49-F238E27FC236}">
-                <a16:creationId xmlns:a16="http://schemas.microsoft.com/office/drawing/2014/main" id="{2E03F15E-18FE-4E65-B556-CBCC35D79B6F}"/>
+                <a16:creationId xmlns:a16="http://schemas.microsoft.com/office/drawing/2014/main" id="{B471258F-4095-4468-B85C-B9BC9B4BEBB0}"/>
               </a:ext>
             </a:extLst>
           </p:cNvPr>
@@ -6444,7 +7003,7 @@
               <a:buNone/>
             </a:pPr>
             <a:r>
-              <a:t>Find MainPage, AppShell, and Resources.</a:t>
+              <a:t>Your C# model has no user interface code.</a:t>
             </a:r>
           </a:p>
           <a:p xmlns:a="http://schemas.openxmlformats.org/drawingml/2006/main">
@@ -6452,7 +7011,15 @@
               <a:buNone/>
             </a:pPr>
             <a:r>
-              <a:t>Explain the job of each file.</a:t>
+              <a:t>XAML chooses controls and layout for that data.</a:t>
+            </a:r>
+          </a:p>
+          <a:p xmlns:a="http://schemas.openxmlformats.org/drawingml/2006/main">
+            <a:pPr lvl="0">
+              <a:buNone/>
+            </a:pPr>
+            <a:r>
+              <a:t>The page connects a user action to the model.</a:t>
             </a:r>
           </a:p>
         </p:txBody>
@@ -6485,44 +7052,16 @@
           <a:lstStyle xmlns:a="http://schemas.openxmlformats.org/drawingml/2006/main"/>
           <a:p xmlns:a="http://schemas.openxmlformats.org/drawingml/2006/main">
             <a:r>
-              <a:t>Step 1 Check</a:t>
+              <a:t>From C# to the screen</a:t>
             </a:r>
             <a:endParaRPr/>
           </a:p>
         </p:txBody>
       </p:sp>
-      <p:pic>
-        <p:nvPicPr>
-          <p:cNvPr id="4" name="">
-            <a:extLst xmlns:a="http://schemas.openxmlformats.org/drawingml/2006/main">
-              <a:ext uri="{FF2B5EF4-FFF2-40B4-BE49-F238E27FC236}">
-                <a16:creationId xmlns:a16="http://schemas.microsoft.com/office/drawing/2014/main" id="{17654F75-32CE-4385-8957-1BEF40D99CD8}"/>
-              </a:ext>
-            </a:extLst>
-          </p:cNvPr>
-          <p:cNvPicPr>
-            <a:picLocks xmlns:a="http://schemas.openxmlformats.org/drawingml/2006/main" noChangeAspect="1"/>
-          </p:cNvPicPr>
-          <p:nvPr/>
-        </p:nvPicPr>
-        <p:blipFill>
-          <a:blip xmlns:r="http://schemas.openxmlformats.org/officeDocument/2006/relationships" xmlns:a="http://schemas.openxmlformats.org/drawingml/2006/main" r:embed="Rc994f39c147b4ae8"/>
-          <a:stretch xmlns:a="http://schemas.openxmlformats.org/drawingml/2006/main"/>
-        </p:blipFill>
-        <p:spPr>
-          <a:xfrm xmlns:a="http://schemas.openxmlformats.org/drawingml/2006/main">
-            <a:off x="2667000" y="3397063"/>
-            <a:ext cx="6858000" cy="2635624"/>
-          </a:xfrm>
-          <a:prstGeom xmlns:a="http://schemas.openxmlformats.org/drawingml/2006/main" prst="rect">
-            <a:avLst/>
-          </a:prstGeom>
-        </p:spPr>
-      </p:pic>
     </p:spTree>
     <p:extLst>
       <p:ext uri="{BB962C8B-B14F-4D97-AF65-F5344CB8AC3E}">
-        <p14:creationId xmlns:p14="http://schemas.microsoft.com/office/powerpoint/2010/main" val="209962490"/>
+        <p14:creationId xmlns:p14="http://schemas.microsoft.com/office/powerpoint/2010/main" val="1114140307"/>
       </p:ext>
     </p:extLst>
   </p:cSld>
@@ -6546,7 +7085,7 @@
           <p:cNvPr id="2" name="Content Placeholder 2">
             <a:extLst xmlns:a="http://schemas.openxmlformats.org/drawingml/2006/main">
               <a:ext uri="{FF2B5EF4-FFF2-40B4-BE49-F238E27FC236}">
-                <a16:creationId xmlns:a16="http://schemas.microsoft.com/office/drawing/2014/main" id="{2E03F15E-18FE-4E65-B556-CBCC35D79B6F}"/>
+                <a16:creationId xmlns:a16="http://schemas.microsoft.com/office/drawing/2014/main" id="{B471258F-4095-4468-B85C-B9BC9B4BEBB0}"/>
               </a:ext>
             </a:extLst>
           </p:cNvPr>
@@ -6566,7 +7105,7 @@
               <a:buNone/>
             </a:pPr>
             <a:r>
-              <a:t>Export the logo as a transparent PNG.</a:t>
+              <a:t>XAML defines the visible page.</a:t>
             </a:r>
           </a:p>
           <a:p xmlns:a="http://schemas.openxmlformats.org/drawingml/2006/main">
@@ -6574,7 +7113,15 @@
               <a:buNone/>
             </a:pPr>
             <a:r>
-              <a:t>Keep the app icon square.</a:t>
+              <a:t>C# code handles page behavior.</a:t>
+            </a:r>
+          </a:p>
+          <a:p xmlns:a="http://schemas.openxmlformats.org/drawingml/2006/main">
+            <a:pPr lvl="0">
+              <a:buNone/>
+            </a:pPr>
+            <a:r>
+              <a:t>Resources holds images and app artwork.</a:t>
             </a:r>
           </a:p>
         </p:txBody>
@@ -6607,7 +7154,7 @@
           <a:lstStyle xmlns:a="http://schemas.openxmlformats.org/drawingml/2006/main"/>
           <a:p xmlns:a="http://schemas.openxmlformats.org/drawingml/2006/main">
             <a:r>
-              <a:t>Step 5 Image resources</a:t>
+              <a:t>Step 1: MAUI project files</a:t>
             </a:r>
             <a:endParaRPr/>
           </a:p>
@@ -6616,7 +7163,7 @@
     </p:spTree>
     <p:extLst>
       <p:ext uri="{BB962C8B-B14F-4D97-AF65-F5344CB8AC3E}">
-        <p14:creationId xmlns:p14="http://schemas.microsoft.com/office/powerpoint/2010/main" val="358990388"/>
+        <p14:creationId xmlns:p14="http://schemas.microsoft.com/office/powerpoint/2010/main" val="733208691"/>
       </p:ext>
     </p:extLst>
   </p:cSld>
@@ -6640,7 +7187,7 @@
           <p:cNvPr id="2" name="Content Placeholder 2">
             <a:extLst xmlns:a="http://schemas.openxmlformats.org/drawingml/2006/main">
               <a:ext uri="{FF2B5EF4-FFF2-40B4-BE49-F238E27FC236}">
-                <a16:creationId xmlns:a16="http://schemas.microsoft.com/office/drawing/2014/main" id="{2E03F15E-18FE-4E65-B556-CBCC35D79B6F}"/>
+                <a16:creationId xmlns:a16="http://schemas.microsoft.com/office/drawing/2014/main" id="{B471258F-4095-4468-B85C-B9BC9B4BEBB0}"/>
               </a:ext>
             </a:extLst>
           </p:cNvPr>
@@ -6660,7 +7207,7 @@
               <a:buNone/>
             </a:pPr>
             <a:r>
-              <a:t>The transparent logo is ready for the app.</a:t>
+              <a:t>Find MainPage, AppShell, and Resources.</a:t>
             </a:r>
           </a:p>
           <a:p xmlns:a="http://schemas.openxmlformats.org/drawingml/2006/main">
@@ -6668,7 +7215,7 @@
               <a:buNone/>
             </a:pPr>
             <a:r>
-              <a:t>The Home page can show it in Step 6.</a:t>
+              <a:t>Explain the job of each file.</a:t>
             </a:r>
           </a:p>
         </p:txBody>
@@ -6701,7 +7248,7 @@
           <a:lstStyle xmlns:a="http://schemas.openxmlformats.org/drawingml/2006/main"/>
           <a:p xmlns:a="http://schemas.openxmlformats.org/drawingml/2006/main">
             <a:r>
-              <a:t>Step 5 Check</a:t>
+              <a:t>Step 1: What changed?</a:t>
             </a:r>
             <a:endParaRPr/>
           </a:p>
@@ -6712,7 +7259,7 @@
           <p:cNvPr id="4" name="">
             <a:extLst xmlns:a="http://schemas.openxmlformats.org/drawingml/2006/main">
               <a:ext uri="{FF2B5EF4-FFF2-40B4-BE49-F238E27FC236}">
-                <a16:creationId xmlns:a16="http://schemas.microsoft.com/office/drawing/2014/main" id="{1A5C2856-7E79-45D5-A0B4-C027762EA6C6}"/>
+                <a16:creationId xmlns:a16="http://schemas.microsoft.com/office/drawing/2014/main" id="{CFCE05CF-5292-44BE-B84C-FA011E098CA0}"/>
               </a:ext>
             </a:extLst>
           </p:cNvPr>
@@ -6722,13 +7269,13 @@
           <p:nvPr/>
         </p:nvPicPr>
         <p:blipFill>
-          <a:blip xmlns:r="http://schemas.openxmlformats.org/officeDocument/2006/relationships" xmlns:a="http://schemas.openxmlformats.org/drawingml/2006/main" r:embed="Rdccb0f6047434f9e"/>
+          <a:blip xmlns:r="http://schemas.openxmlformats.org/officeDocument/2006/relationships" xmlns:a="http://schemas.openxmlformats.org/drawingml/2006/main" r:embed="R7b2ce80b98be4634"/>
           <a:stretch xmlns:a="http://schemas.openxmlformats.org/drawingml/2006/main"/>
         </p:blipFill>
         <p:spPr>
           <a:xfrm xmlns:a="http://schemas.openxmlformats.org/drawingml/2006/main">
-            <a:off x="3227294" y="3190875"/>
-            <a:ext cx="5737412" cy="3048000"/>
+            <a:off x="2667000" y="3397063"/>
+            <a:ext cx="6858000" cy="2635624"/>
           </a:xfrm>
           <a:prstGeom xmlns:a="http://schemas.openxmlformats.org/drawingml/2006/main" prst="rect">
             <a:avLst/>
@@ -6738,7 +7285,7 @@
     </p:spTree>
     <p:extLst>
       <p:ext uri="{BB962C8B-B14F-4D97-AF65-F5344CB8AC3E}">
-        <p14:creationId xmlns:p14="http://schemas.microsoft.com/office/powerpoint/2010/main" val="735253860"/>
+        <p14:creationId xmlns:p14="http://schemas.microsoft.com/office/powerpoint/2010/main" val="1209634882"/>
       </p:ext>
     </p:extLst>
   </p:cSld>
@@ -6762,7 +7309,7 @@
           <p:cNvPr id="2" name="Content Placeholder 2">
             <a:extLst xmlns:a="http://schemas.openxmlformats.org/drawingml/2006/main">
               <a:ext uri="{FF2B5EF4-FFF2-40B4-BE49-F238E27FC236}">
-                <a16:creationId xmlns:a16="http://schemas.microsoft.com/office/drawing/2014/main" id="{2E03F15E-18FE-4E65-B556-CBCC35D79B6F}"/>
+                <a16:creationId xmlns:a16="http://schemas.microsoft.com/office/drawing/2014/main" id="{B471258F-4095-4468-B85C-B9BC9B4BEBB0}"/>
               </a:ext>
             </a:extLst>
           </p:cNvPr>
@@ -6782,7 +7329,7 @@
               <a:buNone/>
             </a:pPr>
             <a:r>
-              <a:t>A model stores one material item.</a:t>
+              <a:t>Export the logo as a transparent PNG.</a:t>
             </a:r>
           </a:p>
           <a:p xmlns:a="http://schemas.openxmlformats.org/drawingml/2006/main">
@@ -6790,7 +7337,7 @@
               <a:buNone/>
             </a:pPr>
             <a:r>
-              <a:t>TotalCost uses cost and quantity.</a:t>
+              <a:t>Keep the app icon square.</a:t>
             </a:r>
           </a:p>
         </p:txBody>
@@ -6823,7 +7370,7 @@
           <a:lstStyle xmlns:a="http://schemas.openxmlformats.org/drawingml/2006/main"/>
           <a:p xmlns:a="http://schemas.openxmlformats.org/drawingml/2006/main">
             <a:r>
-              <a:t>Step 12 MaterialItem model</a:t>
+              <a:t>Step 5: Image resources</a:t>
             </a:r>
             <a:endParaRPr/>
           </a:p>
@@ -6832,7 +7379,7 @@
     </p:spTree>
     <p:extLst>
       <p:ext uri="{BB962C8B-B14F-4D97-AF65-F5344CB8AC3E}">
-        <p14:creationId xmlns:p14="http://schemas.microsoft.com/office/powerpoint/2010/main" val="202470757"/>
+        <p14:creationId xmlns:p14="http://schemas.microsoft.com/office/powerpoint/2010/main" val="1650231811"/>
       </p:ext>
     </p:extLst>
   </p:cSld>
@@ -6856,7 +7403,7 @@
           <p:cNvPr id="2" name="Content Placeholder 2">
             <a:extLst xmlns:a="http://schemas.openxmlformats.org/drawingml/2006/main">
               <a:ext uri="{FF2B5EF4-FFF2-40B4-BE49-F238E27FC236}">
-                <a16:creationId xmlns:a16="http://schemas.microsoft.com/office/drawing/2014/main" id="{2E03F15E-18FE-4E65-B556-CBCC35D79B6F}"/>
+                <a16:creationId xmlns:a16="http://schemas.microsoft.com/office/drawing/2014/main" id="{B471258F-4095-4468-B85C-B9BC9B4BEBB0}"/>
               </a:ext>
             </a:extLst>
           </p:cNvPr>
@@ -6876,7 +7423,7 @@
               <a:buNone/>
             </a:pPr>
             <a:r>
-              <a:t>Create one item with the required values.</a:t>
+              <a:t>The transparent logo is ready for the app.</a:t>
             </a:r>
           </a:p>
           <a:p xmlns:a="http://schemas.openxmlformats.org/drawingml/2006/main">
@@ -6884,7 +7431,7 @@
               <a:buNone/>
             </a:pPr>
             <a:r>
-              <a:t>Check its calculated total.</a:t>
+              <a:t>The Home page can show it in Step 6.</a:t>
             </a:r>
           </a:p>
         </p:txBody>
@@ -6917,7 +7464,7 @@
           <a:lstStyle xmlns:a="http://schemas.openxmlformats.org/drawingml/2006/main"/>
           <a:p xmlns:a="http://schemas.openxmlformats.org/drawingml/2006/main">
             <a:r>
-              <a:t>Step 12 Check</a:t>
+              <a:t>Step 5: What changed?</a:t>
             </a:r>
             <a:endParaRPr/>
           </a:p>
@@ -6928,7 +7475,7 @@
           <p:cNvPr id="4" name="">
             <a:extLst xmlns:a="http://schemas.openxmlformats.org/drawingml/2006/main">
               <a:ext uri="{FF2B5EF4-FFF2-40B4-BE49-F238E27FC236}">
-                <a16:creationId xmlns:a16="http://schemas.microsoft.com/office/drawing/2014/main" id="{DF29CE01-A200-4E6B-BD44-56A1E7AE48E7}"/>
+                <a16:creationId xmlns:a16="http://schemas.microsoft.com/office/drawing/2014/main" id="{FD7DE305-9F28-40B0-BCBE-8B584EE519B5}"/>
               </a:ext>
             </a:extLst>
           </p:cNvPr>
@@ -6938,13 +7485,13 @@
           <p:nvPr/>
         </p:nvPicPr>
         <p:blipFill>
-          <a:blip xmlns:r="http://schemas.openxmlformats.org/officeDocument/2006/relationships" xmlns:a="http://schemas.openxmlformats.org/drawingml/2006/main" r:embed="R8b8947bdd4f3460d"/>
+          <a:blip xmlns:r="http://schemas.openxmlformats.org/officeDocument/2006/relationships" xmlns:a="http://schemas.openxmlformats.org/drawingml/2006/main" r:embed="R081c3825b1174807"/>
           <a:stretch xmlns:a="http://schemas.openxmlformats.org/drawingml/2006/main"/>
         </p:blipFill>
         <p:spPr>
           <a:xfrm xmlns:a="http://schemas.openxmlformats.org/drawingml/2006/main">
-            <a:off x="2667000" y="3397063"/>
-            <a:ext cx="6858000" cy="2635624"/>
+            <a:off x="3227294" y="3190875"/>
+            <a:ext cx="5737412" cy="3048000"/>
           </a:xfrm>
           <a:prstGeom xmlns:a="http://schemas.openxmlformats.org/drawingml/2006/main" prst="rect">
             <a:avLst/>
@@ -6954,7 +7501,7 @@
     </p:spTree>
     <p:extLst>
       <p:ext uri="{BB962C8B-B14F-4D97-AF65-F5344CB8AC3E}">
-        <p14:creationId xmlns:p14="http://schemas.microsoft.com/office/powerpoint/2010/main" val="2134009520"/>
+        <p14:creationId xmlns:p14="http://schemas.microsoft.com/office/powerpoint/2010/main" val="545251604"/>
       </p:ext>
     </p:extLst>
   </p:cSld>
@@ -6978,7 +7525,7 @@
           <p:cNvPr id="2" name="Content Placeholder 2">
             <a:extLst xmlns:a="http://schemas.openxmlformats.org/drawingml/2006/main">
               <a:ext uri="{FF2B5EF4-FFF2-40B4-BE49-F238E27FC236}">
-                <a16:creationId xmlns:a16="http://schemas.microsoft.com/office/drawing/2014/main" id="{2E03F15E-18FE-4E65-B556-CBCC35D79B6F}"/>
+                <a16:creationId xmlns:a16="http://schemas.microsoft.com/office/drawing/2014/main" id="{B471258F-4095-4468-B85C-B9BC9B4BEBB0}"/>
               </a:ext>
             </a:extLst>
           </p:cNvPr>
@@ -6998,7 +7545,7 @@
               <a:buNone/>
             </a:pPr>
             <a:r>
-              <a:t>A vertical layout stacks the inputs.</a:t>
+              <a:t>A model stores one material item.</a:t>
             </a:r>
           </a:p>
           <a:p xmlns:a="http://schemas.openxmlformats.org/drawingml/2006/main">
@@ -7006,7 +7553,7 @@
               <a:buNone/>
             </a:pPr>
             <a:r>
-              <a:t>A ScrollView keeps the form usable.</a:t>
+              <a:t>TotalCost uses cost and quantity.</a:t>
             </a:r>
           </a:p>
         </p:txBody>
@@ -7039,7 +7586,7 @@
           <a:lstStyle xmlns:a="http://schemas.openxmlformats.org/drawingml/2006/main"/>
           <a:p xmlns:a="http://schemas.openxmlformats.org/drawingml/2006/main">
             <a:r>
-              <a:t>Step 16 Editor page layout</a:t>
+              <a:t>Step 12: MaterialItem model</a:t>
             </a:r>
             <a:endParaRPr/>
           </a:p>
@@ -7048,7 +7595,7 @@
     </p:spTree>
     <p:extLst>
       <p:ext uri="{BB962C8B-B14F-4D97-AF65-F5344CB8AC3E}">
-        <p14:creationId xmlns:p14="http://schemas.microsoft.com/office/powerpoint/2010/main" val="1882265605"/>
+        <p14:creationId xmlns:p14="http://schemas.microsoft.com/office/powerpoint/2010/main" val="1566298174"/>
       </p:ext>
     </p:extLst>
   </p:cSld>
